--- a/reports/2026-09-15.pptx
+++ b/reports/2026-09-15.pptx
@@ -3382,11 +3382,11 @@
             <a:r>
               <a:rPr sz="2400" b="1">
                 <a:solidFill>
-                  <a:srgbClr val="198974"/>
-                </a:solidFill>
-                <a:latin typeface="Microsoft YaHei"/>
-              </a:rPr>
-              <a:t>0.02%</a:t>
+                  <a:srgbClr val="BF4040"/>
+                </a:solidFill>
+                <a:latin typeface="Microsoft YaHei"/>
+              </a:rPr>
+              <a:t>-0.99%</a:t>
             </a:r>
           </a:p>
         </p:txBody>
@@ -3533,7 +3533,7 @@
                 </a:solidFill>
                 <a:latin typeface="Microsoft YaHei"/>
               </a:rPr>
-              <a:t>-1.78%</a:t>
+              <a:t>-3.05%</a:t>
             </a:r>
           </a:p>
         </p:txBody>
@@ -3680,7 +3680,7 @@
                 </a:solidFill>
                 <a:latin typeface="Microsoft YaHei"/>
               </a:rPr>
-              <a:t>3</a:t>
+              <a:t>4</a:t>
             </a:r>
           </a:p>
         </p:txBody>
@@ -4235,8 +4235,8 @@
         </p:nvSpPr>
         <p:spPr>
           <a:xfrm>
-            <a:off x="1602343" y="1792224"/>
-            <a:ext cx="820816" cy="146304"/>
+            <a:off x="2076208" y="1792224"/>
+            <a:ext cx="346951" cy="146304"/>
           </a:xfrm>
           <a:prstGeom prst="rect">
             <a:avLst/>
@@ -4299,7 +4299,7 @@
                 </a:solidFill>
                 <a:latin typeface="Microsoft YaHei"/>
               </a:rPr>
-              <a:t>-0.63%</a:t>
+              <a:t>-0.62%</a:t>
             </a:r>
           </a:p>
         </p:txBody>
@@ -4389,8 +4389,8 @@
         </p:nvSpPr>
         <p:spPr>
           <a:xfrm>
-            <a:off x="1727134" y="2176272"/>
-            <a:ext cx="696025" cy="146304"/>
+            <a:off x="2249969" y="2176272"/>
+            <a:ext cx="173190" cy="146304"/>
           </a:xfrm>
           <a:prstGeom prst="rect">
             <a:avLst/>
@@ -4453,7 +4453,7 @@
                 </a:solidFill>
                 <a:latin typeface="Microsoft YaHei"/>
               </a:rPr>
-              <a:t>-0.54%</a:t>
+              <a:t>-0.31%</a:t>
             </a:r>
           </a:p>
         </p:txBody>
@@ -4543,8 +4543,1462 @@
         </p:nvSpPr>
         <p:spPr>
           <a:xfrm>
-            <a:off x="2423160" y="2560320"/>
-            <a:ext cx="1184310" cy="146304"/>
+            <a:off x="1970664" y="2560320"/>
+            <a:ext cx="452495" cy="146304"/>
+          </a:xfrm>
+          <a:prstGeom prst="rect">
+            <a:avLst/>
+          </a:prstGeom>
+          <a:solidFill>
+            <a:srgbClr val="BF4040"/>
+          </a:solidFill>
+          <a:ln>
+            <a:noFill/>
+          </a:ln>
+        </p:spPr>
+        <p:style>
+          <a:lnRef idx="1">
+            <a:schemeClr val="accent1"/>
+          </a:lnRef>
+          <a:fillRef idx="3">
+            <a:schemeClr val="accent1"/>
+          </a:fillRef>
+          <a:effectRef idx="2">
+            <a:schemeClr val="accent1"/>
+          </a:effectRef>
+          <a:fontRef idx="minor">
+            <a:schemeClr val="lt1"/>
+          </a:fontRef>
+        </p:style>
+        <p:txBody>
+          <a:bodyPr rtlCol="0" anchor="ctr"/>
+          <a:lstStyle/>
+          <a:p>
+            <a:pPr algn="ctr"/>
+          </a:p>
+        </p:txBody>
+      </p:sp>
+      <p:sp>
+        <p:nvSpPr>
+          <p:cNvPr id="17" name="TextBox 16"/>
+          <p:cNvSpPr txBox="1"/>
+          <p:nvPr/>
+        </p:nvSpPr>
+        <p:spPr>
+          <a:xfrm>
+            <a:off x="2468879" y="2514600"/>
+            <a:ext cx="502920" cy="201168"/>
+          </a:xfrm>
+          <a:prstGeom prst="rect">
+            <a:avLst/>
+          </a:prstGeom>
+          <a:noFill/>
+        </p:spPr>
+        <p:txBody>
+          <a:bodyPr wrap="none" lIns="18288" rIns="18288" tIns="18288" bIns="18288">
+            <a:spAutoFit/>
+          </a:bodyPr>
+          <a:lstStyle/>
+          <a:p>
+            <a:r>
+              <a:rPr sz="800" b="0">
+                <a:solidFill>
+                  <a:srgbClr val="1A2026"/>
+                </a:solidFill>
+                <a:latin typeface="Microsoft YaHei"/>
+              </a:rPr>
+              <a:t>-0.81%</a:t>
+            </a:r>
+          </a:p>
+        </p:txBody>
+      </p:sp>
+      <p:sp>
+        <p:nvSpPr>
+          <p:cNvPr id="18" name="TextBox 17"/>
+          <p:cNvSpPr txBox="1"/>
+          <p:nvPr/>
+        </p:nvSpPr>
+        <p:spPr>
+          <a:xfrm>
+            <a:off x="640080" y="2889503"/>
+            <a:ext cx="1078992" cy="201168"/>
+          </a:xfrm>
+          <a:prstGeom prst="rect">
+            <a:avLst/>
+          </a:prstGeom>
+          <a:noFill/>
+        </p:spPr>
+        <p:txBody>
+          <a:bodyPr wrap="none" lIns="18288" rIns="18288" tIns="18288" bIns="18288">
+            <a:spAutoFit/>
+          </a:bodyPr>
+          <a:lstStyle/>
+          <a:p>
+            <a:r>
+              <a:rPr sz="800" b="0">
+                <a:solidFill>
+                  <a:srgbClr val="65707D"/>
+                </a:solidFill>
+                <a:latin typeface="Microsoft YaHei"/>
+              </a:rPr>
+              <a:t>兴全安泰积极养老</a:t>
+            </a:r>
+          </a:p>
+        </p:txBody>
+      </p:sp>
+      <p:sp>
+        <p:nvSpPr>
+          <p:cNvPr id="19" name="Rectangle 18"/>
+          <p:cNvSpPr/>
+          <p:nvPr/>
+        </p:nvSpPr>
+        <p:spPr>
+          <a:xfrm>
+            <a:off x="2423160" y="2962656"/>
+            <a:ext cx="9144" cy="118872"/>
+          </a:xfrm>
+          <a:prstGeom prst="rect">
+            <a:avLst/>
+          </a:prstGeom>
+          <a:solidFill>
+            <a:srgbClr val="DAD5C9"/>
+          </a:solidFill>
+          <a:ln>
+            <a:noFill/>
+          </a:ln>
+        </p:spPr>
+        <p:style>
+          <a:lnRef idx="1">
+            <a:schemeClr val="accent1"/>
+          </a:lnRef>
+          <a:fillRef idx="3">
+            <a:schemeClr val="accent1"/>
+          </a:fillRef>
+          <a:effectRef idx="2">
+            <a:schemeClr val="accent1"/>
+          </a:effectRef>
+          <a:fontRef idx="minor">
+            <a:schemeClr val="lt1"/>
+          </a:fontRef>
+        </p:style>
+        <p:txBody>
+          <a:bodyPr rtlCol="0" anchor="ctr"/>
+          <a:lstStyle/>
+          <a:p>
+            <a:pPr algn="ctr"/>
+          </a:p>
+        </p:txBody>
+      </p:sp>
+      <p:sp>
+        <p:nvSpPr>
+          <p:cNvPr id="20" name="Rectangle 19"/>
+          <p:cNvSpPr/>
+          <p:nvPr/>
+        </p:nvSpPr>
+        <p:spPr>
+          <a:xfrm>
+            <a:off x="1963762" y="2944368"/>
+            <a:ext cx="459397" cy="146304"/>
+          </a:xfrm>
+          <a:prstGeom prst="rect">
+            <a:avLst/>
+          </a:prstGeom>
+          <a:solidFill>
+            <a:srgbClr val="BF4040"/>
+          </a:solidFill>
+          <a:ln>
+            <a:noFill/>
+          </a:ln>
+        </p:spPr>
+        <p:style>
+          <a:lnRef idx="1">
+            <a:schemeClr val="accent1"/>
+          </a:lnRef>
+          <a:fillRef idx="3">
+            <a:schemeClr val="accent1"/>
+          </a:fillRef>
+          <a:effectRef idx="2">
+            <a:schemeClr val="accent1"/>
+          </a:effectRef>
+          <a:fontRef idx="minor">
+            <a:schemeClr val="lt1"/>
+          </a:fontRef>
+        </p:style>
+        <p:txBody>
+          <a:bodyPr rtlCol="0" anchor="ctr"/>
+          <a:lstStyle/>
+          <a:p>
+            <a:pPr algn="ctr"/>
+          </a:p>
+        </p:txBody>
+      </p:sp>
+      <p:sp>
+        <p:nvSpPr>
+          <p:cNvPr id="21" name="TextBox 20"/>
+          <p:cNvSpPr txBox="1"/>
+          <p:nvPr/>
+        </p:nvSpPr>
+        <p:spPr>
+          <a:xfrm>
+            <a:off x="2468879" y="2898648"/>
+            <a:ext cx="502920" cy="201168"/>
+          </a:xfrm>
+          <a:prstGeom prst="rect">
+            <a:avLst/>
+          </a:prstGeom>
+          <a:noFill/>
+        </p:spPr>
+        <p:txBody>
+          <a:bodyPr wrap="none" lIns="18288" rIns="18288" tIns="18288" bIns="18288">
+            <a:spAutoFit/>
+          </a:bodyPr>
+          <a:lstStyle/>
+          <a:p>
+            <a:r>
+              <a:rPr sz="800" b="0">
+                <a:solidFill>
+                  <a:srgbClr val="1A2026"/>
+                </a:solidFill>
+                <a:latin typeface="Microsoft YaHei"/>
+              </a:rPr>
+              <a:t>-0.83%</a:t>
+            </a:r>
+          </a:p>
+        </p:txBody>
+      </p:sp>
+      <p:sp>
+        <p:nvSpPr>
+          <p:cNvPr id="22" name="TextBox 21"/>
+          <p:cNvSpPr txBox="1"/>
+          <p:nvPr/>
+        </p:nvSpPr>
+        <p:spPr>
+          <a:xfrm>
+            <a:off x="640080" y="3273551"/>
+            <a:ext cx="1078992" cy="201168"/>
+          </a:xfrm>
+          <a:prstGeom prst="rect">
+            <a:avLst/>
+          </a:prstGeom>
+          <a:noFill/>
+        </p:spPr>
+        <p:txBody>
+          <a:bodyPr wrap="none" lIns="18288" rIns="18288" tIns="18288" bIns="18288">
+            <a:spAutoFit/>
+          </a:bodyPr>
+          <a:lstStyle/>
+          <a:p>
+            <a:r>
+              <a:rPr sz="800" b="0">
+                <a:solidFill>
+                  <a:srgbClr val="65707D"/>
+                </a:solidFill>
+                <a:latin typeface="Microsoft YaHei"/>
+              </a:rPr>
+              <a:t>易方达全球优质企</a:t>
+            </a:r>
+          </a:p>
+        </p:txBody>
+      </p:sp>
+      <p:sp>
+        <p:nvSpPr>
+          <p:cNvPr id="23" name="Rectangle 22"/>
+          <p:cNvSpPr/>
+          <p:nvPr/>
+        </p:nvSpPr>
+        <p:spPr>
+          <a:xfrm>
+            <a:off x="2423160" y="3346703"/>
+            <a:ext cx="9144" cy="118872"/>
+          </a:xfrm>
+          <a:prstGeom prst="rect">
+            <a:avLst/>
+          </a:prstGeom>
+          <a:solidFill>
+            <a:srgbClr val="DAD5C9"/>
+          </a:solidFill>
+          <a:ln>
+            <a:noFill/>
+          </a:ln>
+        </p:spPr>
+        <p:style>
+          <a:lnRef idx="1">
+            <a:schemeClr val="accent1"/>
+          </a:lnRef>
+          <a:fillRef idx="3">
+            <a:schemeClr val="accent1"/>
+          </a:fillRef>
+          <a:effectRef idx="2">
+            <a:schemeClr val="accent1"/>
+          </a:effectRef>
+          <a:fontRef idx="minor">
+            <a:schemeClr val="lt1"/>
+          </a:fontRef>
+        </p:style>
+        <p:txBody>
+          <a:bodyPr rtlCol="0" anchor="ctr"/>
+          <a:lstStyle/>
+          <a:p>
+            <a:pPr algn="ctr"/>
+          </a:p>
+        </p:txBody>
+      </p:sp>
+      <p:sp>
+        <p:nvSpPr>
+          <p:cNvPr id="24" name="Rectangle 23"/>
+          <p:cNvSpPr/>
+          <p:nvPr/>
+        </p:nvSpPr>
+        <p:spPr>
+          <a:xfrm>
+            <a:off x="1097280" y="3328415"/>
+            <a:ext cx="1325880" cy="146304"/>
+          </a:xfrm>
+          <a:prstGeom prst="rect">
+            <a:avLst/>
+          </a:prstGeom>
+          <a:solidFill>
+            <a:srgbClr val="BF4040"/>
+          </a:solidFill>
+          <a:ln>
+            <a:noFill/>
+          </a:ln>
+        </p:spPr>
+        <p:style>
+          <a:lnRef idx="1">
+            <a:schemeClr val="accent1"/>
+          </a:lnRef>
+          <a:fillRef idx="3">
+            <a:schemeClr val="accent1"/>
+          </a:fillRef>
+          <a:effectRef idx="2">
+            <a:schemeClr val="accent1"/>
+          </a:effectRef>
+          <a:fontRef idx="minor">
+            <a:schemeClr val="lt1"/>
+          </a:fontRef>
+        </p:style>
+        <p:txBody>
+          <a:bodyPr rtlCol="0" anchor="ctr"/>
+          <a:lstStyle/>
+          <a:p>
+            <a:pPr algn="ctr"/>
+          </a:p>
+        </p:txBody>
+      </p:sp>
+      <p:sp>
+        <p:nvSpPr>
+          <p:cNvPr id="25" name="TextBox 24"/>
+          <p:cNvSpPr txBox="1"/>
+          <p:nvPr/>
+        </p:nvSpPr>
+        <p:spPr>
+          <a:xfrm>
+            <a:off x="2468879" y="3282696"/>
+            <a:ext cx="502920" cy="201168"/>
+          </a:xfrm>
+          <a:prstGeom prst="rect">
+            <a:avLst/>
+          </a:prstGeom>
+          <a:noFill/>
+        </p:spPr>
+        <p:txBody>
+          <a:bodyPr wrap="none" lIns="18288" rIns="18288" tIns="18288" bIns="18288">
+            <a:spAutoFit/>
+          </a:bodyPr>
+          <a:lstStyle/>
+          <a:p>
+            <a:r>
+              <a:rPr sz="800" b="0">
+                <a:solidFill>
+                  <a:srgbClr val="1A2026"/>
+                </a:solidFill>
+                <a:latin typeface="Microsoft YaHei"/>
+              </a:rPr>
+              <a:t>-2.38%</a:t>
+            </a:r>
+          </a:p>
+        </p:txBody>
+      </p:sp>
+      <p:sp>
+        <p:nvSpPr>
+          <p:cNvPr id="26" name="TextBox 25"/>
+          <p:cNvSpPr txBox="1"/>
+          <p:nvPr/>
+        </p:nvSpPr>
+        <p:spPr>
+          <a:xfrm>
+            <a:off x="4251960" y="1371600"/>
+            <a:ext cx="3383280" cy="219456"/>
+          </a:xfrm>
+          <a:prstGeom prst="rect">
+            <a:avLst/>
+          </a:prstGeom>
+          <a:noFill/>
+        </p:spPr>
+        <p:txBody>
+          <a:bodyPr wrap="none" lIns="18288" rIns="18288" tIns="18288" bIns="18288">
+            <a:spAutoFit/>
+          </a:bodyPr>
+          <a:lstStyle/>
+          <a:p>
+            <a:r>
+              <a:rPr sz="1100" b="1">
+                <a:solidFill>
+                  <a:srgbClr val="1A2026"/>
+                </a:solidFill>
+                <a:latin typeface="Microsoft YaHei"/>
+              </a:rPr>
+              <a:t>近1周收益</a:t>
+            </a:r>
+          </a:p>
+        </p:txBody>
+      </p:sp>
+      <p:sp>
+        <p:nvSpPr>
+          <p:cNvPr id="27" name="TextBox 26"/>
+          <p:cNvSpPr txBox="1"/>
+          <p:nvPr/>
+        </p:nvSpPr>
+        <p:spPr>
+          <a:xfrm>
+            <a:off x="4251960" y="1737360"/>
+            <a:ext cx="1078992" cy="201168"/>
+          </a:xfrm>
+          <a:prstGeom prst="rect">
+            <a:avLst/>
+          </a:prstGeom>
+          <a:noFill/>
+        </p:spPr>
+        <p:txBody>
+          <a:bodyPr wrap="none" lIns="18288" rIns="18288" tIns="18288" bIns="18288">
+            <a:spAutoFit/>
+          </a:bodyPr>
+          <a:lstStyle/>
+          <a:p>
+            <a:r>
+              <a:rPr sz="800" b="0">
+                <a:solidFill>
+                  <a:srgbClr val="65707D"/>
+                </a:solidFill>
+                <a:latin typeface="Microsoft YaHei"/>
+              </a:rPr>
+              <a:t>华夏沪深300E</a:t>
+            </a:r>
+          </a:p>
+        </p:txBody>
+      </p:sp>
+      <p:sp>
+        <p:nvSpPr>
+          <p:cNvPr id="28" name="Rectangle 27"/>
+          <p:cNvSpPr/>
+          <p:nvPr/>
+        </p:nvSpPr>
+        <p:spPr>
+          <a:xfrm>
+            <a:off x="6035040" y="1810512"/>
+            <a:ext cx="9144" cy="118872"/>
+          </a:xfrm>
+          <a:prstGeom prst="rect">
+            <a:avLst/>
+          </a:prstGeom>
+          <a:solidFill>
+            <a:srgbClr val="DAD5C9"/>
+          </a:solidFill>
+          <a:ln>
+            <a:noFill/>
+          </a:ln>
+        </p:spPr>
+        <p:style>
+          <a:lnRef idx="1">
+            <a:schemeClr val="accent1"/>
+          </a:lnRef>
+          <a:fillRef idx="3">
+            <a:schemeClr val="accent1"/>
+          </a:fillRef>
+          <a:effectRef idx="2">
+            <a:schemeClr val="accent1"/>
+          </a:effectRef>
+          <a:fontRef idx="minor">
+            <a:schemeClr val="lt1"/>
+          </a:fontRef>
+        </p:style>
+        <p:txBody>
+          <a:bodyPr rtlCol="0" anchor="ctr"/>
+          <a:lstStyle/>
+          <a:p>
+            <a:pPr algn="ctr"/>
+          </a:p>
+        </p:txBody>
+      </p:sp>
+      <p:sp>
+        <p:nvSpPr>
+          <p:cNvPr id="29" name="Rectangle 28"/>
+          <p:cNvSpPr/>
+          <p:nvPr/>
+        </p:nvSpPr>
+        <p:spPr>
+          <a:xfrm>
+            <a:off x="4709160" y="1792224"/>
+            <a:ext cx="1325880" cy="146304"/>
+          </a:xfrm>
+          <a:prstGeom prst="rect">
+            <a:avLst/>
+          </a:prstGeom>
+          <a:solidFill>
+            <a:srgbClr val="BF4040"/>
+          </a:solidFill>
+          <a:ln>
+            <a:noFill/>
+          </a:ln>
+        </p:spPr>
+        <p:style>
+          <a:lnRef idx="1">
+            <a:schemeClr val="accent1"/>
+          </a:lnRef>
+          <a:fillRef idx="3">
+            <a:schemeClr val="accent1"/>
+          </a:fillRef>
+          <a:effectRef idx="2">
+            <a:schemeClr val="accent1"/>
+          </a:effectRef>
+          <a:fontRef idx="minor">
+            <a:schemeClr val="lt1"/>
+          </a:fontRef>
+        </p:style>
+        <p:txBody>
+          <a:bodyPr rtlCol="0" anchor="ctr"/>
+          <a:lstStyle/>
+          <a:p>
+            <a:pPr algn="ctr"/>
+          </a:p>
+        </p:txBody>
+      </p:sp>
+      <p:sp>
+        <p:nvSpPr>
+          <p:cNvPr id="30" name="TextBox 29"/>
+          <p:cNvSpPr txBox="1"/>
+          <p:nvPr/>
+        </p:nvSpPr>
+        <p:spPr>
+          <a:xfrm>
+            <a:off x="6080760" y="1746504"/>
+            <a:ext cx="502920" cy="201168"/>
+          </a:xfrm>
+          <a:prstGeom prst="rect">
+            <a:avLst/>
+          </a:prstGeom>
+          <a:noFill/>
+        </p:spPr>
+        <p:txBody>
+          <a:bodyPr wrap="none" lIns="18288" rIns="18288" tIns="18288" bIns="18288">
+            <a:spAutoFit/>
+          </a:bodyPr>
+          <a:lstStyle/>
+          <a:p>
+            <a:r>
+              <a:rPr sz="800" b="0">
+                <a:solidFill>
+                  <a:srgbClr val="1A2026"/>
+                </a:solidFill>
+                <a:latin typeface="Microsoft YaHei"/>
+              </a:rPr>
+              <a:t>-2.19%</a:t>
+            </a:r>
+          </a:p>
+        </p:txBody>
+      </p:sp>
+      <p:sp>
+        <p:nvSpPr>
+          <p:cNvPr id="31" name="TextBox 30"/>
+          <p:cNvSpPr txBox="1"/>
+          <p:nvPr/>
+        </p:nvSpPr>
+        <p:spPr>
+          <a:xfrm>
+            <a:off x="4251960" y="2121408"/>
+            <a:ext cx="1078992" cy="201168"/>
+          </a:xfrm>
+          <a:prstGeom prst="rect">
+            <a:avLst/>
+          </a:prstGeom>
+          <a:noFill/>
+        </p:spPr>
+        <p:txBody>
+          <a:bodyPr wrap="none" lIns="18288" rIns="18288" tIns="18288" bIns="18288">
+            <a:spAutoFit/>
+          </a:bodyPr>
+          <a:lstStyle/>
+          <a:p>
+            <a:r>
+              <a:rPr sz="800" b="0">
+                <a:solidFill>
+                  <a:srgbClr val="65707D"/>
+                </a:solidFill>
+                <a:latin typeface="Microsoft YaHei"/>
+              </a:rPr>
+              <a:t>富国红利精选QD</a:t>
+            </a:r>
+          </a:p>
+        </p:txBody>
+      </p:sp>
+      <p:sp>
+        <p:nvSpPr>
+          <p:cNvPr id="32" name="Rectangle 31"/>
+          <p:cNvSpPr/>
+          <p:nvPr/>
+        </p:nvSpPr>
+        <p:spPr>
+          <a:xfrm>
+            <a:off x="6035040" y="2194560"/>
+            <a:ext cx="9144" cy="118872"/>
+          </a:xfrm>
+          <a:prstGeom prst="rect">
+            <a:avLst/>
+          </a:prstGeom>
+          <a:solidFill>
+            <a:srgbClr val="DAD5C9"/>
+          </a:solidFill>
+          <a:ln>
+            <a:noFill/>
+          </a:ln>
+        </p:spPr>
+        <p:style>
+          <a:lnRef idx="1">
+            <a:schemeClr val="accent1"/>
+          </a:lnRef>
+          <a:fillRef idx="3">
+            <a:schemeClr val="accent1"/>
+          </a:fillRef>
+          <a:effectRef idx="2">
+            <a:schemeClr val="accent1"/>
+          </a:effectRef>
+          <a:fontRef idx="minor">
+            <a:schemeClr val="lt1"/>
+          </a:fontRef>
+        </p:style>
+        <p:txBody>
+          <a:bodyPr rtlCol="0" anchor="ctr"/>
+          <a:lstStyle/>
+          <a:p>
+            <a:pPr algn="ctr"/>
+          </a:p>
+        </p:txBody>
+      </p:sp>
+      <p:sp>
+        <p:nvSpPr>
+          <p:cNvPr id="33" name="Rectangle 32"/>
+          <p:cNvSpPr/>
+          <p:nvPr/>
+        </p:nvSpPr>
+        <p:spPr>
+          <a:xfrm>
+            <a:off x="5410660" y="2176272"/>
+            <a:ext cx="624379" cy="146304"/>
+          </a:xfrm>
+          <a:prstGeom prst="rect">
+            <a:avLst/>
+          </a:prstGeom>
+          <a:solidFill>
+            <a:srgbClr val="BF4040"/>
+          </a:solidFill>
+          <a:ln>
+            <a:noFill/>
+          </a:ln>
+        </p:spPr>
+        <p:style>
+          <a:lnRef idx="1">
+            <a:schemeClr val="accent1"/>
+          </a:lnRef>
+          <a:fillRef idx="3">
+            <a:schemeClr val="accent1"/>
+          </a:fillRef>
+          <a:effectRef idx="2">
+            <a:schemeClr val="accent1"/>
+          </a:effectRef>
+          <a:fontRef idx="minor">
+            <a:schemeClr val="lt1"/>
+          </a:fontRef>
+        </p:style>
+        <p:txBody>
+          <a:bodyPr rtlCol="0" anchor="ctr"/>
+          <a:lstStyle/>
+          <a:p>
+            <a:pPr algn="ctr"/>
+          </a:p>
+        </p:txBody>
+      </p:sp>
+      <p:sp>
+        <p:nvSpPr>
+          <p:cNvPr id="34" name="TextBox 33"/>
+          <p:cNvSpPr txBox="1"/>
+          <p:nvPr/>
+        </p:nvSpPr>
+        <p:spPr>
+          <a:xfrm>
+            <a:off x="6080760" y="2130552"/>
+            <a:ext cx="502920" cy="201168"/>
+          </a:xfrm>
+          <a:prstGeom prst="rect">
+            <a:avLst/>
+          </a:prstGeom>
+          <a:noFill/>
+        </p:spPr>
+        <p:txBody>
+          <a:bodyPr wrap="none" lIns="18288" rIns="18288" tIns="18288" bIns="18288">
+            <a:spAutoFit/>
+          </a:bodyPr>
+          <a:lstStyle/>
+          <a:p>
+            <a:r>
+              <a:rPr sz="800" b="0">
+                <a:solidFill>
+                  <a:srgbClr val="1A2026"/>
+                </a:solidFill>
+                <a:latin typeface="Microsoft YaHei"/>
+              </a:rPr>
+              <a:t>-1.03%</a:t>
+            </a:r>
+          </a:p>
+        </p:txBody>
+      </p:sp>
+      <p:sp>
+        <p:nvSpPr>
+          <p:cNvPr id="35" name="TextBox 34"/>
+          <p:cNvSpPr txBox="1"/>
+          <p:nvPr/>
+        </p:nvSpPr>
+        <p:spPr>
+          <a:xfrm>
+            <a:off x="4251960" y="2505456"/>
+            <a:ext cx="1078992" cy="201168"/>
+          </a:xfrm>
+          <a:prstGeom prst="rect">
+            <a:avLst/>
+          </a:prstGeom>
+          <a:noFill/>
+        </p:spPr>
+        <p:txBody>
+          <a:bodyPr wrap="none" lIns="18288" rIns="18288" tIns="18288" bIns="18288">
+            <a:spAutoFit/>
+          </a:bodyPr>
+          <a:lstStyle/>
+          <a:p>
+            <a:r>
+              <a:rPr sz="800" b="0">
+                <a:solidFill>
+                  <a:srgbClr val="65707D"/>
+                </a:solidFill>
+                <a:latin typeface="Microsoft YaHei"/>
+              </a:rPr>
+              <a:t>纳斯达克100指</a:t>
+            </a:r>
+          </a:p>
+        </p:txBody>
+      </p:sp>
+      <p:sp>
+        <p:nvSpPr>
+          <p:cNvPr id="36" name="Rectangle 35"/>
+          <p:cNvSpPr/>
+          <p:nvPr/>
+        </p:nvSpPr>
+        <p:spPr>
+          <a:xfrm>
+            <a:off x="6035040" y="2578608"/>
+            <a:ext cx="9144" cy="118872"/>
+          </a:xfrm>
+          <a:prstGeom prst="rect">
+            <a:avLst/>
+          </a:prstGeom>
+          <a:solidFill>
+            <a:srgbClr val="DAD5C9"/>
+          </a:solidFill>
+          <a:ln>
+            <a:noFill/>
+          </a:ln>
+        </p:spPr>
+        <p:style>
+          <a:lnRef idx="1">
+            <a:schemeClr val="accent1"/>
+          </a:lnRef>
+          <a:fillRef idx="3">
+            <a:schemeClr val="accent1"/>
+          </a:fillRef>
+          <a:effectRef idx="2">
+            <a:schemeClr val="accent1"/>
+          </a:effectRef>
+          <a:fontRef idx="minor">
+            <a:schemeClr val="lt1"/>
+          </a:fontRef>
+        </p:style>
+        <p:txBody>
+          <a:bodyPr rtlCol="0" anchor="ctr"/>
+          <a:lstStyle/>
+          <a:p>
+            <a:pPr algn="ctr"/>
+          </a:p>
+        </p:txBody>
+      </p:sp>
+      <p:sp>
+        <p:nvSpPr>
+          <p:cNvPr id="37" name="Rectangle 36"/>
+          <p:cNvSpPr/>
+          <p:nvPr/>
+        </p:nvSpPr>
+        <p:spPr>
+          <a:xfrm>
+            <a:off x="5196687" y="2560320"/>
+            <a:ext cx="838352" cy="146304"/>
+          </a:xfrm>
+          <a:prstGeom prst="rect">
+            <a:avLst/>
+          </a:prstGeom>
+          <a:solidFill>
+            <a:srgbClr val="BF4040"/>
+          </a:solidFill>
+          <a:ln>
+            <a:noFill/>
+          </a:ln>
+        </p:spPr>
+        <p:style>
+          <a:lnRef idx="1">
+            <a:schemeClr val="accent1"/>
+          </a:lnRef>
+          <a:fillRef idx="3">
+            <a:schemeClr val="accent1"/>
+          </a:fillRef>
+          <a:effectRef idx="2">
+            <a:schemeClr val="accent1"/>
+          </a:effectRef>
+          <a:fontRef idx="minor">
+            <a:schemeClr val="lt1"/>
+          </a:fontRef>
+        </p:style>
+        <p:txBody>
+          <a:bodyPr rtlCol="0" anchor="ctr"/>
+          <a:lstStyle/>
+          <a:p>
+            <a:pPr algn="ctr"/>
+          </a:p>
+        </p:txBody>
+      </p:sp>
+      <p:sp>
+        <p:nvSpPr>
+          <p:cNvPr id="38" name="TextBox 37"/>
+          <p:cNvSpPr txBox="1"/>
+          <p:nvPr/>
+        </p:nvSpPr>
+        <p:spPr>
+          <a:xfrm>
+            <a:off x="6080760" y="2514600"/>
+            <a:ext cx="502920" cy="201168"/>
+          </a:xfrm>
+          <a:prstGeom prst="rect">
+            <a:avLst/>
+          </a:prstGeom>
+          <a:noFill/>
+        </p:spPr>
+        <p:txBody>
+          <a:bodyPr wrap="none" lIns="18288" rIns="18288" tIns="18288" bIns="18288">
+            <a:spAutoFit/>
+          </a:bodyPr>
+          <a:lstStyle/>
+          <a:p>
+            <a:r>
+              <a:rPr sz="800" b="0">
+                <a:solidFill>
+                  <a:srgbClr val="1A2026"/>
+                </a:solidFill>
+                <a:latin typeface="Microsoft YaHei"/>
+              </a:rPr>
+              <a:t>-1.39%</a:t>
+            </a:r>
+          </a:p>
+        </p:txBody>
+      </p:sp>
+      <p:sp>
+        <p:nvSpPr>
+          <p:cNvPr id="39" name="TextBox 38"/>
+          <p:cNvSpPr txBox="1"/>
+          <p:nvPr/>
+        </p:nvSpPr>
+        <p:spPr>
+          <a:xfrm>
+            <a:off x="4251960" y="2889503"/>
+            <a:ext cx="1078992" cy="201168"/>
+          </a:xfrm>
+          <a:prstGeom prst="rect">
+            <a:avLst/>
+          </a:prstGeom>
+          <a:noFill/>
+        </p:spPr>
+        <p:txBody>
+          <a:bodyPr wrap="none" lIns="18288" rIns="18288" tIns="18288" bIns="18288">
+            <a:spAutoFit/>
+          </a:bodyPr>
+          <a:lstStyle/>
+          <a:p>
+            <a:r>
+              <a:rPr sz="800" b="0">
+                <a:solidFill>
+                  <a:srgbClr val="65707D"/>
+                </a:solidFill>
+                <a:latin typeface="Microsoft YaHei"/>
+              </a:rPr>
+              <a:t>兴全安泰积极养老</a:t>
+            </a:r>
+          </a:p>
+        </p:txBody>
+      </p:sp>
+      <p:sp>
+        <p:nvSpPr>
+          <p:cNvPr id="40" name="Rectangle 39"/>
+          <p:cNvSpPr/>
+          <p:nvPr/>
+        </p:nvSpPr>
+        <p:spPr>
+          <a:xfrm>
+            <a:off x="6035040" y="2962656"/>
+            <a:ext cx="9144" cy="118872"/>
+          </a:xfrm>
+          <a:prstGeom prst="rect">
+            <a:avLst/>
+          </a:prstGeom>
+          <a:solidFill>
+            <a:srgbClr val="DAD5C9"/>
+          </a:solidFill>
+          <a:ln>
+            <a:noFill/>
+          </a:ln>
+        </p:spPr>
+        <p:style>
+          <a:lnRef idx="1">
+            <a:schemeClr val="accent1"/>
+          </a:lnRef>
+          <a:fillRef idx="3">
+            <a:schemeClr val="accent1"/>
+          </a:fillRef>
+          <a:effectRef idx="2">
+            <a:schemeClr val="accent1"/>
+          </a:effectRef>
+          <a:fontRef idx="minor">
+            <a:schemeClr val="lt1"/>
+          </a:fontRef>
+        </p:style>
+        <p:txBody>
+          <a:bodyPr rtlCol="0" anchor="ctr"/>
+          <a:lstStyle/>
+          <a:p>
+            <a:pPr algn="ctr"/>
+          </a:p>
+        </p:txBody>
+      </p:sp>
+      <p:sp>
+        <p:nvSpPr>
+          <p:cNvPr id="41" name="Rectangle 40"/>
+          <p:cNvSpPr/>
+          <p:nvPr/>
+        </p:nvSpPr>
+        <p:spPr>
+          <a:xfrm>
+            <a:off x="5298310" y="2944368"/>
+            <a:ext cx="736729" cy="146304"/>
+          </a:xfrm>
+          <a:prstGeom prst="rect">
+            <a:avLst/>
+          </a:prstGeom>
+          <a:solidFill>
+            <a:srgbClr val="BF4040"/>
+          </a:solidFill>
+          <a:ln>
+            <a:noFill/>
+          </a:ln>
+        </p:spPr>
+        <p:style>
+          <a:lnRef idx="1">
+            <a:schemeClr val="accent1"/>
+          </a:lnRef>
+          <a:fillRef idx="3">
+            <a:schemeClr val="accent1"/>
+          </a:fillRef>
+          <a:effectRef idx="2">
+            <a:schemeClr val="accent1"/>
+          </a:effectRef>
+          <a:fontRef idx="minor">
+            <a:schemeClr val="lt1"/>
+          </a:fontRef>
+        </p:style>
+        <p:txBody>
+          <a:bodyPr rtlCol="0" anchor="ctr"/>
+          <a:lstStyle/>
+          <a:p>
+            <a:pPr algn="ctr"/>
+          </a:p>
+        </p:txBody>
+      </p:sp>
+      <p:sp>
+        <p:nvSpPr>
+          <p:cNvPr id="42" name="TextBox 41"/>
+          <p:cNvSpPr txBox="1"/>
+          <p:nvPr/>
+        </p:nvSpPr>
+        <p:spPr>
+          <a:xfrm>
+            <a:off x="6080760" y="2898648"/>
+            <a:ext cx="502920" cy="201168"/>
+          </a:xfrm>
+          <a:prstGeom prst="rect">
+            <a:avLst/>
+          </a:prstGeom>
+          <a:noFill/>
+        </p:spPr>
+        <p:txBody>
+          <a:bodyPr wrap="none" lIns="18288" rIns="18288" tIns="18288" bIns="18288">
+            <a:spAutoFit/>
+          </a:bodyPr>
+          <a:lstStyle/>
+          <a:p>
+            <a:r>
+              <a:rPr sz="800" b="0">
+                <a:solidFill>
+                  <a:srgbClr val="1A2026"/>
+                </a:solidFill>
+                <a:latin typeface="Microsoft YaHei"/>
+              </a:rPr>
+              <a:t>-1.22%</a:t>
+            </a:r>
+          </a:p>
+        </p:txBody>
+      </p:sp>
+      <p:sp>
+        <p:nvSpPr>
+          <p:cNvPr id="43" name="TextBox 42"/>
+          <p:cNvSpPr txBox="1"/>
+          <p:nvPr/>
+        </p:nvSpPr>
+        <p:spPr>
+          <a:xfrm>
+            <a:off x="4251960" y="3273551"/>
+            <a:ext cx="1078992" cy="201168"/>
+          </a:xfrm>
+          <a:prstGeom prst="rect">
+            <a:avLst/>
+          </a:prstGeom>
+          <a:noFill/>
+        </p:spPr>
+        <p:txBody>
+          <a:bodyPr wrap="none" lIns="18288" rIns="18288" tIns="18288" bIns="18288">
+            <a:spAutoFit/>
+          </a:bodyPr>
+          <a:lstStyle/>
+          <a:p>
+            <a:r>
+              <a:rPr sz="800" b="0">
+                <a:solidFill>
+                  <a:srgbClr val="65707D"/>
+                </a:solidFill>
+                <a:latin typeface="Microsoft YaHei"/>
+              </a:rPr>
+              <a:t>易方达全球优质企</a:t>
+            </a:r>
+          </a:p>
+        </p:txBody>
+      </p:sp>
+      <p:sp>
+        <p:nvSpPr>
+          <p:cNvPr id="44" name="Rectangle 43"/>
+          <p:cNvSpPr/>
+          <p:nvPr/>
+        </p:nvSpPr>
+        <p:spPr>
+          <a:xfrm>
+            <a:off x="6035040" y="3346703"/>
+            <a:ext cx="9144" cy="118872"/>
+          </a:xfrm>
+          <a:prstGeom prst="rect">
+            <a:avLst/>
+          </a:prstGeom>
+          <a:solidFill>
+            <a:srgbClr val="DAD5C9"/>
+          </a:solidFill>
+          <a:ln>
+            <a:noFill/>
+          </a:ln>
+        </p:spPr>
+        <p:style>
+          <a:lnRef idx="1">
+            <a:schemeClr val="accent1"/>
+          </a:lnRef>
+          <a:fillRef idx="3">
+            <a:schemeClr val="accent1"/>
+          </a:fillRef>
+          <a:effectRef idx="2">
+            <a:schemeClr val="accent1"/>
+          </a:effectRef>
+          <a:fontRef idx="minor">
+            <a:schemeClr val="lt1"/>
+          </a:fontRef>
+        </p:style>
+        <p:txBody>
+          <a:bodyPr rtlCol="0" anchor="ctr"/>
+          <a:lstStyle/>
+          <a:p>
+            <a:pPr algn="ctr"/>
+          </a:p>
+        </p:txBody>
+      </p:sp>
+      <p:sp>
+        <p:nvSpPr>
+          <p:cNvPr id="45" name="Rectangle 44"/>
+          <p:cNvSpPr/>
+          <p:nvPr/>
+        </p:nvSpPr>
+        <p:spPr>
+          <a:xfrm>
+            <a:off x="4712519" y="3328415"/>
+            <a:ext cx="1322520" cy="146304"/>
+          </a:xfrm>
+          <a:prstGeom prst="rect">
+            <a:avLst/>
+          </a:prstGeom>
+          <a:solidFill>
+            <a:srgbClr val="BF4040"/>
+          </a:solidFill>
+          <a:ln>
+            <a:noFill/>
+          </a:ln>
+        </p:spPr>
+        <p:style>
+          <a:lnRef idx="1">
+            <a:schemeClr val="accent1"/>
+          </a:lnRef>
+          <a:fillRef idx="3">
+            <a:schemeClr val="accent1"/>
+          </a:fillRef>
+          <a:effectRef idx="2">
+            <a:schemeClr val="accent1"/>
+          </a:effectRef>
+          <a:fontRef idx="minor">
+            <a:schemeClr val="lt1"/>
+          </a:fontRef>
+        </p:style>
+        <p:txBody>
+          <a:bodyPr rtlCol="0" anchor="ctr"/>
+          <a:lstStyle/>
+          <a:p>
+            <a:pPr algn="ctr"/>
+          </a:p>
+        </p:txBody>
+      </p:sp>
+      <p:sp>
+        <p:nvSpPr>
+          <p:cNvPr id="46" name="TextBox 45"/>
+          <p:cNvSpPr txBox="1"/>
+          <p:nvPr/>
+        </p:nvSpPr>
+        <p:spPr>
+          <a:xfrm>
+            <a:off x="6080760" y="3282696"/>
+            <a:ext cx="502920" cy="201168"/>
+          </a:xfrm>
+          <a:prstGeom prst="rect">
+            <a:avLst/>
+          </a:prstGeom>
+          <a:noFill/>
+        </p:spPr>
+        <p:txBody>
+          <a:bodyPr wrap="none" lIns="18288" rIns="18288" tIns="18288" bIns="18288">
+            <a:spAutoFit/>
+          </a:bodyPr>
+          <a:lstStyle/>
+          <a:p>
+            <a:r>
+              <a:rPr sz="800" b="0">
+                <a:solidFill>
+                  <a:srgbClr val="1A2026"/>
+                </a:solidFill>
+                <a:latin typeface="Microsoft YaHei"/>
+              </a:rPr>
+              <a:t>-2.19%</a:t>
+            </a:r>
+          </a:p>
+        </p:txBody>
+      </p:sp>
+      <p:sp>
+        <p:nvSpPr>
+          <p:cNvPr id="47" name="TextBox 46"/>
+          <p:cNvSpPr txBox="1"/>
+          <p:nvPr/>
+        </p:nvSpPr>
+        <p:spPr>
+          <a:xfrm>
+            <a:off x="7863840" y="1371600"/>
+            <a:ext cx="3383280" cy="219456"/>
+          </a:xfrm>
+          <a:prstGeom prst="rect">
+            <a:avLst/>
+          </a:prstGeom>
+          <a:noFill/>
+        </p:spPr>
+        <p:txBody>
+          <a:bodyPr wrap="none" lIns="18288" rIns="18288" tIns="18288" bIns="18288">
+            <a:spAutoFit/>
+          </a:bodyPr>
+          <a:lstStyle/>
+          <a:p>
+            <a:r>
+              <a:rPr sz="1100" b="1">
+                <a:solidFill>
+                  <a:srgbClr val="1A2026"/>
+                </a:solidFill>
+                <a:latin typeface="Microsoft YaHei"/>
+              </a:rPr>
+              <a:t>近1个月收益</a:t>
+            </a:r>
+          </a:p>
+        </p:txBody>
+      </p:sp>
+      <p:sp>
+        <p:nvSpPr>
+          <p:cNvPr id="48" name="TextBox 47"/>
+          <p:cNvSpPr txBox="1"/>
+          <p:nvPr/>
+        </p:nvSpPr>
+        <p:spPr>
+          <a:xfrm>
+            <a:off x="7863840" y="1737360"/>
+            <a:ext cx="1078992" cy="201168"/>
+          </a:xfrm>
+          <a:prstGeom prst="rect">
+            <a:avLst/>
+          </a:prstGeom>
+          <a:noFill/>
+        </p:spPr>
+        <p:txBody>
+          <a:bodyPr wrap="none" lIns="18288" rIns="18288" tIns="18288" bIns="18288">
+            <a:spAutoFit/>
+          </a:bodyPr>
+          <a:lstStyle/>
+          <a:p>
+            <a:r>
+              <a:rPr sz="800" b="0">
+                <a:solidFill>
+                  <a:srgbClr val="65707D"/>
+                </a:solidFill>
+                <a:latin typeface="Microsoft YaHei"/>
+              </a:rPr>
+              <a:t>华夏沪深300E</a:t>
+            </a:r>
+          </a:p>
+        </p:txBody>
+      </p:sp>
+      <p:sp>
+        <p:nvSpPr>
+          <p:cNvPr id="49" name="Rectangle 48"/>
+          <p:cNvSpPr/>
+          <p:nvPr/>
+        </p:nvSpPr>
+        <p:spPr>
+          <a:xfrm>
+            <a:off x="9646919" y="1810512"/>
+            <a:ext cx="9144" cy="118872"/>
+          </a:xfrm>
+          <a:prstGeom prst="rect">
+            <a:avLst/>
+          </a:prstGeom>
+          <a:solidFill>
+            <a:srgbClr val="DAD5C9"/>
+          </a:solidFill>
+          <a:ln>
+            <a:noFill/>
+          </a:ln>
+        </p:spPr>
+        <p:style>
+          <a:lnRef idx="1">
+            <a:schemeClr val="accent1"/>
+          </a:lnRef>
+          <a:fillRef idx="3">
+            <a:schemeClr val="accent1"/>
+          </a:fillRef>
+          <a:effectRef idx="2">
+            <a:schemeClr val="accent1"/>
+          </a:effectRef>
+          <a:fontRef idx="minor">
+            <a:schemeClr val="lt1"/>
+          </a:fontRef>
+        </p:style>
+        <p:txBody>
+          <a:bodyPr rtlCol="0" anchor="ctr"/>
+          <a:lstStyle/>
+          <a:p>
+            <a:pPr algn="ctr"/>
+          </a:p>
+        </p:txBody>
+      </p:sp>
+      <p:sp>
+        <p:nvSpPr>
+          <p:cNvPr id="50" name="Rectangle 49"/>
+          <p:cNvSpPr/>
+          <p:nvPr/>
+        </p:nvSpPr>
+        <p:spPr>
+          <a:xfrm>
+            <a:off x="8397104" y="1792224"/>
+            <a:ext cx="1249815" cy="146304"/>
+          </a:xfrm>
+          <a:prstGeom prst="rect">
+            <a:avLst/>
+          </a:prstGeom>
+          <a:solidFill>
+            <a:srgbClr val="BF4040"/>
+          </a:solidFill>
+          <a:ln>
+            <a:noFill/>
+          </a:ln>
+        </p:spPr>
+        <p:style>
+          <a:lnRef idx="1">
+            <a:schemeClr val="accent1"/>
+          </a:lnRef>
+          <a:fillRef idx="3">
+            <a:schemeClr val="accent1"/>
+          </a:fillRef>
+          <a:effectRef idx="2">
+            <a:schemeClr val="accent1"/>
+          </a:effectRef>
+          <a:fontRef idx="minor">
+            <a:schemeClr val="lt1"/>
+          </a:fontRef>
+        </p:style>
+        <p:txBody>
+          <a:bodyPr rtlCol="0" anchor="ctr"/>
+          <a:lstStyle/>
+          <a:p>
+            <a:pPr algn="ctr"/>
+          </a:p>
+        </p:txBody>
+      </p:sp>
+      <p:sp>
+        <p:nvSpPr>
+          <p:cNvPr id="51" name="TextBox 50"/>
+          <p:cNvSpPr txBox="1"/>
+          <p:nvPr/>
+        </p:nvSpPr>
+        <p:spPr>
+          <a:xfrm>
+            <a:off x="9692640" y="1746504"/>
+            <a:ext cx="502920" cy="201168"/>
+          </a:xfrm>
+          <a:prstGeom prst="rect">
+            <a:avLst/>
+          </a:prstGeom>
+          <a:noFill/>
+        </p:spPr>
+        <p:txBody>
+          <a:bodyPr wrap="none" lIns="18288" rIns="18288" tIns="18288" bIns="18288">
+            <a:spAutoFit/>
+          </a:bodyPr>
+          <a:lstStyle/>
+          <a:p>
+            <a:r>
+              <a:rPr sz="800" b="0">
+                <a:solidFill>
+                  <a:srgbClr val="1A2026"/>
+                </a:solidFill>
+                <a:latin typeface="Microsoft YaHei"/>
+              </a:rPr>
+              <a:t>-5.63%</a:t>
+            </a:r>
+          </a:p>
+        </p:txBody>
+      </p:sp>
+      <p:sp>
+        <p:nvSpPr>
+          <p:cNvPr id="52" name="TextBox 51"/>
+          <p:cNvSpPr txBox="1"/>
+          <p:nvPr/>
+        </p:nvSpPr>
+        <p:spPr>
+          <a:xfrm>
+            <a:off x="7863840" y="2121408"/>
+            <a:ext cx="1078992" cy="201168"/>
+          </a:xfrm>
+          <a:prstGeom prst="rect">
+            <a:avLst/>
+          </a:prstGeom>
+          <a:noFill/>
+        </p:spPr>
+        <p:txBody>
+          <a:bodyPr wrap="none" lIns="18288" rIns="18288" tIns="18288" bIns="18288">
+            <a:spAutoFit/>
+          </a:bodyPr>
+          <a:lstStyle/>
+          <a:p>
+            <a:r>
+              <a:rPr sz="800" b="0">
+                <a:solidFill>
+                  <a:srgbClr val="65707D"/>
+                </a:solidFill>
+                <a:latin typeface="Microsoft YaHei"/>
+              </a:rPr>
+              <a:t>富国红利精选QD</a:t>
+            </a:r>
+          </a:p>
+        </p:txBody>
+      </p:sp>
+      <p:sp>
+        <p:nvSpPr>
+          <p:cNvPr id="53" name="Rectangle 52"/>
+          <p:cNvSpPr/>
+          <p:nvPr/>
+        </p:nvSpPr>
+        <p:spPr>
+          <a:xfrm>
+            <a:off x="9646919" y="2194560"/>
+            <a:ext cx="9144" cy="118872"/>
+          </a:xfrm>
+          <a:prstGeom prst="rect">
+            <a:avLst/>
+          </a:prstGeom>
+          <a:solidFill>
+            <a:srgbClr val="DAD5C9"/>
+          </a:solidFill>
+          <a:ln>
+            <a:noFill/>
+          </a:ln>
+        </p:spPr>
+        <p:style>
+          <a:lnRef idx="1">
+            <a:schemeClr val="accent1"/>
+          </a:lnRef>
+          <a:fillRef idx="3">
+            <a:schemeClr val="accent1"/>
+          </a:fillRef>
+          <a:effectRef idx="2">
+            <a:schemeClr val="accent1"/>
+          </a:effectRef>
+          <a:fontRef idx="minor">
+            <a:schemeClr val="lt1"/>
+          </a:fontRef>
+        </p:style>
+        <p:txBody>
+          <a:bodyPr rtlCol="0" anchor="ctr"/>
+          <a:lstStyle/>
+          <a:p>
+            <a:pPr algn="ctr"/>
+          </a:p>
+        </p:txBody>
+      </p:sp>
+      <p:sp>
+        <p:nvSpPr>
+          <p:cNvPr id="54" name="Rectangle 53"/>
+          <p:cNvSpPr/>
+          <p:nvPr/>
+        </p:nvSpPr>
+        <p:spPr>
+          <a:xfrm>
+            <a:off x="9646919" y="2176272"/>
+            <a:ext cx="545441" cy="146304"/>
           </a:xfrm>
           <a:prstGeom prst="rect">
             <a:avLst/>
@@ -4580,13 +6034,13 @@
       </p:sp>
       <p:sp>
         <p:nvSpPr>
-          <p:cNvPr id="17" name="TextBox 16"/>
-          <p:cNvSpPr txBox="1"/>
-          <p:nvPr/>
-        </p:nvSpPr>
-        <p:spPr>
-          <a:xfrm>
-            <a:off x="3653190" y="2514600"/>
+          <p:cNvPr id="55" name="TextBox 54"/>
+          <p:cNvSpPr txBox="1"/>
+          <p:nvPr/>
+        </p:nvSpPr>
+        <p:spPr>
+          <a:xfrm>
+            <a:off x="10238081" y="2130552"/>
             <a:ext cx="502920" cy="201168"/>
           </a:xfrm>
           <a:prstGeom prst="rect">
@@ -4607,20 +6061,20 @@
                 </a:solidFill>
                 <a:latin typeface="Microsoft YaHei"/>
               </a:rPr>
-              <a:t>0.91%</a:t>
-            </a:r>
-          </a:p>
-        </p:txBody>
-      </p:sp>
-      <p:sp>
-        <p:nvSpPr>
-          <p:cNvPr id="18" name="TextBox 17"/>
-          <p:cNvSpPr txBox="1"/>
-          <p:nvPr/>
-        </p:nvSpPr>
-        <p:spPr>
-          <a:xfrm>
-            <a:off x="640080" y="2889503"/>
+              <a:t>2.46%</a:t>
+            </a:r>
+          </a:p>
+        </p:txBody>
+      </p:sp>
+      <p:sp>
+        <p:nvSpPr>
+          <p:cNvPr id="56" name="TextBox 55"/>
+          <p:cNvSpPr txBox="1"/>
+          <p:nvPr/>
+        </p:nvSpPr>
+        <p:spPr>
+          <a:xfrm>
+            <a:off x="7863840" y="2505456"/>
             <a:ext cx="1078992" cy="201168"/>
           </a:xfrm>
           <a:prstGeom prst="rect">
@@ -4641,20 +6095,20 @@
                 </a:solidFill>
                 <a:latin typeface="Microsoft YaHei"/>
               </a:rPr>
-              <a:t>兴全安泰积极养老</a:t>
-            </a:r>
-          </a:p>
-        </p:txBody>
-      </p:sp>
-      <p:sp>
-        <p:nvSpPr>
-          <p:cNvPr id="19" name="Rectangle 18"/>
+              <a:t>纳斯达克100指</a:t>
+            </a:r>
+          </a:p>
+        </p:txBody>
+      </p:sp>
+      <p:sp>
+        <p:nvSpPr>
+          <p:cNvPr id="57" name="Rectangle 56"/>
           <p:cNvSpPr/>
           <p:nvPr/>
         </p:nvSpPr>
         <p:spPr>
           <a:xfrm>
-            <a:off x="2423160" y="2962656"/>
+            <a:off x="9646919" y="2578608"/>
             <a:ext cx="9144" cy="118872"/>
           </a:xfrm>
           <a:prstGeom prst="rect">
@@ -4691,14 +6145,14 @@
       </p:sp>
       <p:sp>
         <p:nvSpPr>
-          <p:cNvPr id="20" name="Rectangle 19"/>
+          <p:cNvPr id="58" name="Rectangle 57"/>
           <p:cNvSpPr/>
           <p:nvPr/>
         </p:nvSpPr>
         <p:spPr>
           <a:xfrm>
-            <a:off x="1586478" y="2944368"/>
-            <a:ext cx="836681" cy="146304"/>
+            <a:off x="8879489" y="2560320"/>
+            <a:ext cx="767430" cy="146304"/>
           </a:xfrm>
           <a:prstGeom prst="rect">
             <a:avLst/>
@@ -4734,13 +6188,13 @@
       </p:sp>
       <p:sp>
         <p:nvSpPr>
-          <p:cNvPr id="21" name="TextBox 20"/>
-          <p:cNvSpPr txBox="1"/>
-          <p:nvPr/>
-        </p:nvSpPr>
-        <p:spPr>
-          <a:xfrm>
-            <a:off x="2468879" y="2898648"/>
+          <p:cNvPr id="59" name="TextBox 58"/>
+          <p:cNvSpPr txBox="1"/>
+          <p:nvPr/>
+        </p:nvSpPr>
+        <p:spPr>
+          <a:xfrm>
+            <a:off x="9692640" y="2514600"/>
             <a:ext cx="502920" cy="201168"/>
           </a:xfrm>
           <a:prstGeom prst="rect">
@@ -4761,20 +6215,20 @@
                 </a:solidFill>
                 <a:latin typeface="Microsoft YaHei"/>
               </a:rPr>
-              <a:t>-0.64%</a:t>
-            </a:r>
-          </a:p>
-        </p:txBody>
-      </p:sp>
-      <p:sp>
-        <p:nvSpPr>
-          <p:cNvPr id="22" name="TextBox 21"/>
-          <p:cNvSpPr txBox="1"/>
-          <p:nvPr/>
-        </p:nvSpPr>
-        <p:spPr>
-          <a:xfrm>
-            <a:off x="640080" y="3273551"/>
+              <a:t>-3.46%</a:t>
+            </a:r>
+          </a:p>
+        </p:txBody>
+      </p:sp>
+      <p:sp>
+        <p:nvSpPr>
+          <p:cNvPr id="60" name="TextBox 59"/>
+          <p:cNvSpPr txBox="1"/>
+          <p:nvPr/>
+        </p:nvSpPr>
+        <p:spPr>
+          <a:xfrm>
+            <a:off x="7863840" y="2889503"/>
             <a:ext cx="1078992" cy="201168"/>
           </a:xfrm>
           <a:prstGeom prst="rect">
@@ -4795,20 +6249,20 @@
                 </a:solidFill>
                 <a:latin typeface="Microsoft YaHei"/>
               </a:rPr>
-              <a:t>易方达全球优质企</a:t>
-            </a:r>
-          </a:p>
-        </p:txBody>
-      </p:sp>
-      <p:sp>
-        <p:nvSpPr>
-          <p:cNvPr id="23" name="Rectangle 22"/>
+              <a:t>兴全安泰积极养老</a:t>
+            </a:r>
+          </a:p>
+        </p:txBody>
+      </p:sp>
+      <p:sp>
+        <p:nvSpPr>
+          <p:cNvPr id="61" name="Rectangle 60"/>
           <p:cNvSpPr/>
           <p:nvPr/>
         </p:nvSpPr>
         <p:spPr>
           <a:xfrm>
-            <a:off x="2423160" y="3346703"/>
+            <a:off x="9646919" y="2962656"/>
             <a:ext cx="9144" cy="118872"/>
           </a:xfrm>
           <a:prstGeom prst="rect">
@@ -4845,20 +6299,20 @@
       </p:sp>
       <p:sp>
         <p:nvSpPr>
-          <p:cNvPr id="24" name="Rectangle 23"/>
+          <p:cNvPr id="62" name="Rectangle 61"/>
           <p:cNvSpPr/>
           <p:nvPr/>
         </p:nvSpPr>
         <p:spPr>
           <a:xfrm>
-            <a:off x="2423160" y="3328415"/>
-            <a:ext cx="1325880" cy="146304"/>
+            <a:off x="9055899" y="2944368"/>
+            <a:ext cx="591020" cy="146304"/>
           </a:xfrm>
           <a:prstGeom prst="rect">
             <a:avLst/>
           </a:prstGeom>
           <a:solidFill>
-            <a:srgbClr val="198974"/>
+            <a:srgbClr val="BF4040"/>
           </a:solidFill>
           <a:ln>
             <a:noFill/>
@@ -4888,13 +6342,13 @@
       </p:sp>
       <p:sp>
         <p:nvSpPr>
-          <p:cNvPr id="25" name="TextBox 24"/>
-          <p:cNvSpPr txBox="1"/>
-          <p:nvPr/>
-        </p:nvSpPr>
-        <p:spPr>
-          <a:xfrm>
-            <a:off x="3794759" y="3282696"/>
+          <p:cNvPr id="63" name="TextBox 62"/>
+          <p:cNvSpPr txBox="1"/>
+          <p:nvPr/>
+        </p:nvSpPr>
+        <p:spPr>
+          <a:xfrm>
+            <a:off x="9692640" y="2898648"/>
             <a:ext cx="502920" cy="201168"/>
           </a:xfrm>
           <a:prstGeom prst="rect">
@@ -4915,54 +6369,20 @@
                 </a:solidFill>
                 <a:latin typeface="Microsoft YaHei"/>
               </a:rPr>
-              <a:t>1.02%</a:t>
-            </a:r>
-          </a:p>
-        </p:txBody>
-      </p:sp>
-      <p:sp>
-        <p:nvSpPr>
-          <p:cNvPr id="26" name="TextBox 25"/>
-          <p:cNvSpPr txBox="1"/>
-          <p:nvPr/>
-        </p:nvSpPr>
-        <p:spPr>
-          <a:xfrm>
-            <a:off x="4251960" y="1371600"/>
-            <a:ext cx="3383280" cy="219456"/>
-          </a:xfrm>
-          <a:prstGeom prst="rect">
-            <a:avLst/>
-          </a:prstGeom>
-          <a:noFill/>
-        </p:spPr>
-        <p:txBody>
-          <a:bodyPr wrap="none" lIns="18288" rIns="18288" tIns="18288" bIns="18288">
-            <a:spAutoFit/>
-          </a:bodyPr>
-          <a:lstStyle/>
-          <a:p>
-            <a:r>
-              <a:rPr sz="1100" b="1">
-                <a:solidFill>
-                  <a:srgbClr val="1A2026"/>
-                </a:solidFill>
-                <a:latin typeface="Microsoft YaHei"/>
-              </a:rPr>
-              <a:t>近1周收益</a:t>
-            </a:r>
-          </a:p>
-        </p:txBody>
-      </p:sp>
-      <p:sp>
-        <p:nvSpPr>
-          <p:cNvPr id="27" name="TextBox 26"/>
-          <p:cNvSpPr txBox="1"/>
-          <p:nvPr/>
-        </p:nvSpPr>
-        <p:spPr>
-          <a:xfrm>
-            <a:off x="4251960" y="1737360"/>
+              <a:t>-2.66%</a:t>
+            </a:r>
+          </a:p>
+        </p:txBody>
+      </p:sp>
+      <p:sp>
+        <p:nvSpPr>
+          <p:cNvPr id="64" name="TextBox 63"/>
+          <p:cNvSpPr txBox="1"/>
+          <p:nvPr/>
+        </p:nvSpPr>
+        <p:spPr>
+          <a:xfrm>
+            <a:off x="7863840" y="3273551"/>
             <a:ext cx="1078992" cy="201168"/>
           </a:xfrm>
           <a:prstGeom prst="rect">
@@ -4983,20 +6403,20 @@
                 </a:solidFill>
                 <a:latin typeface="Microsoft YaHei"/>
               </a:rPr>
-              <a:t>华夏沪深300E</a:t>
-            </a:r>
-          </a:p>
-        </p:txBody>
-      </p:sp>
-      <p:sp>
-        <p:nvSpPr>
-          <p:cNvPr id="28" name="Rectangle 27"/>
+              <a:t>易方达全球优质企</a:t>
+            </a:r>
+          </a:p>
+        </p:txBody>
+      </p:sp>
+      <p:sp>
+        <p:nvSpPr>
+          <p:cNvPr id="65" name="Rectangle 64"/>
           <p:cNvSpPr/>
           <p:nvPr/>
         </p:nvSpPr>
         <p:spPr>
           <a:xfrm>
-            <a:off x="6035040" y="1810512"/>
+            <a:off x="9646919" y="3346703"/>
             <a:ext cx="9144" cy="118872"/>
           </a:xfrm>
           <a:prstGeom prst="rect">
@@ -5033,13 +6453,13 @@
       </p:sp>
       <p:sp>
         <p:nvSpPr>
-          <p:cNvPr id="29" name="Rectangle 28"/>
+          <p:cNvPr id="66" name="Rectangle 65"/>
           <p:cNvSpPr/>
           <p:nvPr/>
         </p:nvSpPr>
         <p:spPr>
           <a:xfrm>
-            <a:off x="4709160" y="1792224"/>
+            <a:off x="8321040" y="3328415"/>
             <a:ext cx="1325880" cy="146304"/>
           </a:xfrm>
           <a:prstGeom prst="rect">
@@ -5076,1426 +6496,6 @@
       </p:sp>
       <p:sp>
         <p:nvSpPr>
-          <p:cNvPr id="30" name="TextBox 29"/>
-          <p:cNvSpPr txBox="1"/>
-          <p:nvPr/>
-        </p:nvSpPr>
-        <p:spPr>
-          <a:xfrm>
-            <a:off x="6080760" y="1746504"/>
-            <a:ext cx="502920" cy="201168"/>
-          </a:xfrm>
-          <a:prstGeom prst="rect">
-            <a:avLst/>
-          </a:prstGeom>
-          <a:noFill/>
-        </p:spPr>
-        <p:txBody>
-          <a:bodyPr wrap="none" lIns="18288" rIns="18288" tIns="18288" bIns="18288">
-            <a:spAutoFit/>
-          </a:bodyPr>
-          <a:lstStyle/>
-          <a:p>
-            <a:r>
-              <a:rPr sz="800" b="0">
-                <a:solidFill>
-                  <a:srgbClr val="1A2026"/>
-                </a:solidFill>
-                <a:latin typeface="Microsoft YaHei"/>
-              </a:rPr>
-              <a:t>-1.91%</a:t>
-            </a:r>
-          </a:p>
-        </p:txBody>
-      </p:sp>
-      <p:sp>
-        <p:nvSpPr>
-          <p:cNvPr id="31" name="TextBox 30"/>
-          <p:cNvSpPr txBox="1"/>
-          <p:nvPr/>
-        </p:nvSpPr>
-        <p:spPr>
-          <a:xfrm>
-            <a:off x="4251960" y="2121408"/>
-            <a:ext cx="1078992" cy="201168"/>
-          </a:xfrm>
-          <a:prstGeom prst="rect">
-            <a:avLst/>
-          </a:prstGeom>
-          <a:noFill/>
-        </p:spPr>
-        <p:txBody>
-          <a:bodyPr wrap="none" lIns="18288" rIns="18288" tIns="18288" bIns="18288">
-            <a:spAutoFit/>
-          </a:bodyPr>
-          <a:lstStyle/>
-          <a:p>
-            <a:r>
-              <a:rPr sz="800" b="0">
-                <a:solidFill>
-                  <a:srgbClr val="65707D"/>
-                </a:solidFill>
-                <a:latin typeface="Microsoft YaHei"/>
-              </a:rPr>
-              <a:t>富国红利精选QD</a:t>
-            </a:r>
-          </a:p>
-        </p:txBody>
-      </p:sp>
-      <p:sp>
-        <p:nvSpPr>
-          <p:cNvPr id="32" name="Rectangle 31"/>
-          <p:cNvSpPr/>
-          <p:nvPr/>
-        </p:nvSpPr>
-        <p:spPr>
-          <a:xfrm>
-            <a:off x="6035040" y="2194560"/>
-            <a:ext cx="9144" cy="118872"/>
-          </a:xfrm>
-          <a:prstGeom prst="rect">
-            <a:avLst/>
-          </a:prstGeom>
-          <a:solidFill>
-            <a:srgbClr val="DAD5C9"/>
-          </a:solidFill>
-          <a:ln>
-            <a:noFill/>
-          </a:ln>
-        </p:spPr>
-        <p:style>
-          <a:lnRef idx="1">
-            <a:schemeClr val="accent1"/>
-          </a:lnRef>
-          <a:fillRef idx="3">
-            <a:schemeClr val="accent1"/>
-          </a:fillRef>
-          <a:effectRef idx="2">
-            <a:schemeClr val="accent1"/>
-          </a:effectRef>
-          <a:fontRef idx="minor">
-            <a:schemeClr val="lt1"/>
-          </a:fontRef>
-        </p:style>
-        <p:txBody>
-          <a:bodyPr rtlCol="0" anchor="ctr"/>
-          <a:lstStyle/>
-          <a:p>
-            <a:pPr algn="ctr"/>
-          </a:p>
-        </p:txBody>
-      </p:sp>
-      <p:sp>
-        <p:nvSpPr>
-          <p:cNvPr id="33" name="Rectangle 32"/>
-          <p:cNvSpPr/>
-          <p:nvPr/>
-        </p:nvSpPr>
-        <p:spPr>
-          <a:xfrm>
-            <a:off x="4906939" y="2176272"/>
-            <a:ext cx="1128100" cy="146304"/>
-          </a:xfrm>
-          <a:prstGeom prst="rect">
-            <a:avLst/>
-          </a:prstGeom>
-          <a:solidFill>
-            <a:srgbClr val="BF4040"/>
-          </a:solidFill>
-          <a:ln>
-            <a:noFill/>
-          </a:ln>
-        </p:spPr>
-        <p:style>
-          <a:lnRef idx="1">
-            <a:schemeClr val="accent1"/>
-          </a:lnRef>
-          <a:fillRef idx="3">
-            <a:schemeClr val="accent1"/>
-          </a:fillRef>
-          <a:effectRef idx="2">
-            <a:schemeClr val="accent1"/>
-          </a:effectRef>
-          <a:fontRef idx="minor">
-            <a:schemeClr val="lt1"/>
-          </a:fontRef>
-        </p:style>
-        <p:txBody>
-          <a:bodyPr rtlCol="0" anchor="ctr"/>
-          <a:lstStyle/>
-          <a:p>
-            <a:pPr algn="ctr"/>
-          </a:p>
-        </p:txBody>
-      </p:sp>
-      <p:sp>
-        <p:nvSpPr>
-          <p:cNvPr id="34" name="TextBox 33"/>
-          <p:cNvSpPr txBox="1"/>
-          <p:nvPr/>
-        </p:nvSpPr>
-        <p:spPr>
-          <a:xfrm>
-            <a:off x="6080760" y="2130552"/>
-            <a:ext cx="502920" cy="201168"/>
-          </a:xfrm>
-          <a:prstGeom prst="rect">
-            <a:avLst/>
-          </a:prstGeom>
-          <a:noFill/>
-        </p:spPr>
-        <p:txBody>
-          <a:bodyPr wrap="none" lIns="18288" rIns="18288" tIns="18288" bIns="18288">
-            <a:spAutoFit/>
-          </a:bodyPr>
-          <a:lstStyle/>
-          <a:p>
-            <a:r>
-              <a:rPr sz="800" b="0">
-                <a:solidFill>
-                  <a:srgbClr val="1A2026"/>
-                </a:solidFill>
-                <a:latin typeface="Microsoft YaHei"/>
-              </a:rPr>
-              <a:t>-1.62%</a:t>
-            </a:r>
-          </a:p>
-        </p:txBody>
-      </p:sp>
-      <p:sp>
-        <p:nvSpPr>
-          <p:cNvPr id="35" name="TextBox 34"/>
-          <p:cNvSpPr txBox="1"/>
-          <p:nvPr/>
-        </p:nvSpPr>
-        <p:spPr>
-          <a:xfrm>
-            <a:off x="4251960" y="2505456"/>
-            <a:ext cx="1078992" cy="201168"/>
-          </a:xfrm>
-          <a:prstGeom prst="rect">
-            <a:avLst/>
-          </a:prstGeom>
-          <a:noFill/>
-        </p:spPr>
-        <p:txBody>
-          <a:bodyPr wrap="none" lIns="18288" rIns="18288" tIns="18288" bIns="18288">
-            <a:spAutoFit/>
-          </a:bodyPr>
-          <a:lstStyle/>
-          <a:p>
-            <a:r>
-              <a:rPr sz="800" b="0">
-                <a:solidFill>
-                  <a:srgbClr val="65707D"/>
-                </a:solidFill>
-                <a:latin typeface="Microsoft YaHei"/>
-              </a:rPr>
-              <a:t>纳斯达克100指</a:t>
-            </a:r>
-          </a:p>
-        </p:txBody>
-      </p:sp>
-      <p:sp>
-        <p:nvSpPr>
-          <p:cNvPr id="36" name="Rectangle 35"/>
-          <p:cNvSpPr/>
-          <p:nvPr/>
-        </p:nvSpPr>
-        <p:spPr>
-          <a:xfrm>
-            <a:off x="6035040" y="2578608"/>
-            <a:ext cx="9144" cy="118872"/>
-          </a:xfrm>
-          <a:prstGeom prst="rect">
-            <a:avLst/>
-          </a:prstGeom>
-          <a:solidFill>
-            <a:srgbClr val="DAD5C9"/>
-          </a:solidFill>
-          <a:ln>
-            <a:noFill/>
-          </a:ln>
-        </p:spPr>
-        <p:style>
-          <a:lnRef idx="1">
-            <a:schemeClr val="accent1"/>
-          </a:lnRef>
-          <a:fillRef idx="3">
-            <a:schemeClr val="accent1"/>
-          </a:fillRef>
-          <a:effectRef idx="2">
-            <a:schemeClr val="accent1"/>
-          </a:effectRef>
-          <a:fontRef idx="minor">
-            <a:schemeClr val="lt1"/>
-          </a:fontRef>
-        </p:style>
-        <p:txBody>
-          <a:bodyPr rtlCol="0" anchor="ctr"/>
-          <a:lstStyle/>
-          <a:p>
-            <a:pPr algn="ctr"/>
-          </a:p>
-        </p:txBody>
-      </p:sp>
-      <p:sp>
-        <p:nvSpPr>
-          <p:cNvPr id="37" name="Rectangle 36"/>
-          <p:cNvSpPr/>
-          <p:nvPr/>
-        </p:nvSpPr>
-        <p:spPr>
-          <a:xfrm>
-            <a:off x="5627651" y="2560320"/>
-            <a:ext cx="407388" cy="146304"/>
-          </a:xfrm>
-          <a:prstGeom prst="rect">
-            <a:avLst/>
-          </a:prstGeom>
-          <a:solidFill>
-            <a:srgbClr val="BF4040"/>
-          </a:solidFill>
-          <a:ln>
-            <a:noFill/>
-          </a:ln>
-        </p:spPr>
-        <p:style>
-          <a:lnRef idx="1">
-            <a:schemeClr val="accent1"/>
-          </a:lnRef>
-          <a:fillRef idx="3">
-            <a:schemeClr val="accent1"/>
-          </a:fillRef>
-          <a:effectRef idx="2">
-            <a:schemeClr val="accent1"/>
-          </a:effectRef>
-          <a:fontRef idx="minor">
-            <a:schemeClr val="lt1"/>
-          </a:fontRef>
-        </p:style>
-        <p:txBody>
-          <a:bodyPr rtlCol="0" anchor="ctr"/>
-          <a:lstStyle/>
-          <a:p>
-            <a:pPr algn="ctr"/>
-          </a:p>
-        </p:txBody>
-      </p:sp>
-      <p:sp>
-        <p:nvSpPr>
-          <p:cNvPr id="38" name="TextBox 37"/>
-          <p:cNvSpPr txBox="1"/>
-          <p:nvPr/>
-        </p:nvSpPr>
-        <p:spPr>
-          <a:xfrm>
-            <a:off x="6080760" y="2514600"/>
-            <a:ext cx="502920" cy="201168"/>
-          </a:xfrm>
-          <a:prstGeom prst="rect">
-            <a:avLst/>
-          </a:prstGeom>
-          <a:noFill/>
-        </p:spPr>
-        <p:txBody>
-          <a:bodyPr wrap="none" lIns="18288" rIns="18288" tIns="18288" bIns="18288">
-            <a:spAutoFit/>
-          </a:bodyPr>
-          <a:lstStyle/>
-          <a:p>
-            <a:r>
-              <a:rPr sz="800" b="0">
-                <a:solidFill>
-                  <a:srgbClr val="1A2026"/>
-                </a:solidFill>
-                <a:latin typeface="Microsoft YaHei"/>
-              </a:rPr>
-              <a:t>-0.59%</a:t>
-            </a:r>
-          </a:p>
-        </p:txBody>
-      </p:sp>
-      <p:sp>
-        <p:nvSpPr>
-          <p:cNvPr id="39" name="TextBox 38"/>
-          <p:cNvSpPr txBox="1"/>
-          <p:nvPr/>
-        </p:nvSpPr>
-        <p:spPr>
-          <a:xfrm>
-            <a:off x="4251960" y="2889503"/>
-            <a:ext cx="1078992" cy="201168"/>
-          </a:xfrm>
-          <a:prstGeom prst="rect">
-            <a:avLst/>
-          </a:prstGeom>
-          <a:noFill/>
-        </p:spPr>
-        <p:txBody>
-          <a:bodyPr wrap="none" lIns="18288" rIns="18288" tIns="18288" bIns="18288">
-            <a:spAutoFit/>
-          </a:bodyPr>
-          <a:lstStyle/>
-          <a:p>
-            <a:r>
-              <a:rPr sz="800" b="0">
-                <a:solidFill>
-                  <a:srgbClr val="65707D"/>
-                </a:solidFill>
-                <a:latin typeface="Microsoft YaHei"/>
-              </a:rPr>
-              <a:t>兴全安泰积极养老</a:t>
-            </a:r>
-          </a:p>
-        </p:txBody>
-      </p:sp>
-      <p:sp>
-        <p:nvSpPr>
-          <p:cNvPr id="40" name="Rectangle 39"/>
-          <p:cNvSpPr/>
-          <p:nvPr/>
-        </p:nvSpPr>
-        <p:spPr>
-          <a:xfrm>
-            <a:off x="6035040" y="2962656"/>
-            <a:ext cx="9144" cy="118872"/>
-          </a:xfrm>
-          <a:prstGeom prst="rect">
-            <a:avLst/>
-          </a:prstGeom>
-          <a:solidFill>
-            <a:srgbClr val="DAD5C9"/>
-          </a:solidFill>
-          <a:ln>
-            <a:noFill/>
-          </a:ln>
-        </p:spPr>
-        <p:style>
-          <a:lnRef idx="1">
-            <a:schemeClr val="accent1"/>
-          </a:lnRef>
-          <a:fillRef idx="3">
-            <a:schemeClr val="accent1"/>
-          </a:fillRef>
-          <a:effectRef idx="2">
-            <a:schemeClr val="accent1"/>
-          </a:effectRef>
-          <a:fontRef idx="minor">
-            <a:schemeClr val="lt1"/>
-          </a:fontRef>
-        </p:style>
-        <p:txBody>
-          <a:bodyPr rtlCol="0" anchor="ctr"/>
-          <a:lstStyle/>
-          <a:p>
-            <a:pPr algn="ctr"/>
-          </a:p>
-        </p:txBody>
-      </p:sp>
-      <p:sp>
-        <p:nvSpPr>
-          <p:cNvPr id="41" name="Rectangle 40"/>
-          <p:cNvSpPr/>
-          <p:nvPr/>
-        </p:nvSpPr>
-        <p:spPr>
-          <a:xfrm>
-            <a:off x="5654885" y="2944368"/>
-            <a:ext cx="380154" cy="146304"/>
-          </a:xfrm>
-          <a:prstGeom prst="rect">
-            <a:avLst/>
-          </a:prstGeom>
-          <a:solidFill>
-            <a:srgbClr val="BF4040"/>
-          </a:solidFill>
-          <a:ln>
-            <a:noFill/>
-          </a:ln>
-        </p:spPr>
-        <p:style>
-          <a:lnRef idx="1">
-            <a:schemeClr val="accent1"/>
-          </a:lnRef>
-          <a:fillRef idx="3">
-            <a:schemeClr val="accent1"/>
-          </a:fillRef>
-          <a:effectRef idx="2">
-            <a:schemeClr val="accent1"/>
-          </a:effectRef>
-          <a:fontRef idx="minor">
-            <a:schemeClr val="lt1"/>
-          </a:fontRef>
-        </p:style>
-        <p:txBody>
-          <a:bodyPr rtlCol="0" anchor="ctr"/>
-          <a:lstStyle/>
-          <a:p>
-            <a:pPr algn="ctr"/>
-          </a:p>
-        </p:txBody>
-      </p:sp>
-      <p:sp>
-        <p:nvSpPr>
-          <p:cNvPr id="42" name="TextBox 41"/>
-          <p:cNvSpPr txBox="1"/>
-          <p:nvPr/>
-        </p:nvSpPr>
-        <p:spPr>
-          <a:xfrm>
-            <a:off x="6080760" y="2898648"/>
-            <a:ext cx="502920" cy="201168"/>
-          </a:xfrm>
-          <a:prstGeom prst="rect">
-            <a:avLst/>
-          </a:prstGeom>
-          <a:noFill/>
-        </p:spPr>
-        <p:txBody>
-          <a:bodyPr wrap="none" lIns="18288" rIns="18288" tIns="18288" bIns="18288">
-            <a:spAutoFit/>
-          </a:bodyPr>
-          <a:lstStyle/>
-          <a:p>
-            <a:r>
-              <a:rPr sz="800" b="0">
-                <a:solidFill>
-                  <a:srgbClr val="1A2026"/>
-                </a:solidFill>
-                <a:latin typeface="Microsoft YaHei"/>
-              </a:rPr>
-              <a:t>-0.55%</a:t>
-            </a:r>
-          </a:p>
-        </p:txBody>
-      </p:sp>
-      <p:sp>
-        <p:nvSpPr>
-          <p:cNvPr id="43" name="TextBox 42"/>
-          <p:cNvSpPr txBox="1"/>
-          <p:nvPr/>
-        </p:nvSpPr>
-        <p:spPr>
-          <a:xfrm>
-            <a:off x="4251960" y="3273551"/>
-            <a:ext cx="1078992" cy="201168"/>
-          </a:xfrm>
-          <a:prstGeom prst="rect">
-            <a:avLst/>
-          </a:prstGeom>
-          <a:noFill/>
-        </p:spPr>
-        <p:txBody>
-          <a:bodyPr wrap="none" lIns="18288" rIns="18288" tIns="18288" bIns="18288">
-            <a:spAutoFit/>
-          </a:bodyPr>
-          <a:lstStyle/>
-          <a:p>
-            <a:r>
-              <a:rPr sz="800" b="0">
-                <a:solidFill>
-                  <a:srgbClr val="65707D"/>
-                </a:solidFill>
-                <a:latin typeface="Microsoft YaHei"/>
-              </a:rPr>
-              <a:t>易方达全球优质企</a:t>
-            </a:r>
-          </a:p>
-        </p:txBody>
-      </p:sp>
-      <p:sp>
-        <p:nvSpPr>
-          <p:cNvPr id="44" name="Rectangle 43"/>
-          <p:cNvSpPr/>
-          <p:nvPr/>
-        </p:nvSpPr>
-        <p:spPr>
-          <a:xfrm>
-            <a:off x="6035040" y="3346703"/>
-            <a:ext cx="9144" cy="118872"/>
-          </a:xfrm>
-          <a:prstGeom prst="rect">
-            <a:avLst/>
-          </a:prstGeom>
-          <a:solidFill>
-            <a:srgbClr val="DAD5C9"/>
-          </a:solidFill>
-          <a:ln>
-            <a:noFill/>
-          </a:ln>
-        </p:spPr>
-        <p:style>
-          <a:lnRef idx="1">
-            <a:schemeClr val="accent1"/>
-          </a:lnRef>
-          <a:fillRef idx="3">
-            <a:schemeClr val="accent1"/>
-          </a:fillRef>
-          <a:effectRef idx="2">
-            <a:schemeClr val="accent1"/>
-          </a:effectRef>
-          <a:fontRef idx="minor">
-            <a:schemeClr val="lt1"/>
-          </a:fontRef>
-        </p:style>
-        <p:txBody>
-          <a:bodyPr rtlCol="0" anchor="ctr"/>
-          <a:lstStyle/>
-          <a:p>
-            <a:pPr algn="ctr"/>
-          </a:p>
-        </p:txBody>
-      </p:sp>
-      <p:sp>
-        <p:nvSpPr>
-          <p:cNvPr id="45" name="Rectangle 44"/>
-          <p:cNvSpPr/>
-          <p:nvPr/>
-        </p:nvSpPr>
-        <p:spPr>
-          <a:xfrm>
-            <a:off x="6035040" y="3328415"/>
-            <a:ext cx="1217652" cy="146304"/>
-          </a:xfrm>
-          <a:prstGeom prst="rect">
-            <a:avLst/>
-          </a:prstGeom>
-          <a:solidFill>
-            <a:srgbClr val="198974"/>
-          </a:solidFill>
-          <a:ln>
-            <a:noFill/>
-          </a:ln>
-        </p:spPr>
-        <p:style>
-          <a:lnRef idx="1">
-            <a:schemeClr val="accent1"/>
-          </a:lnRef>
-          <a:fillRef idx="3">
-            <a:schemeClr val="accent1"/>
-          </a:fillRef>
-          <a:effectRef idx="2">
-            <a:schemeClr val="accent1"/>
-          </a:effectRef>
-          <a:fontRef idx="minor">
-            <a:schemeClr val="lt1"/>
-          </a:fontRef>
-        </p:style>
-        <p:txBody>
-          <a:bodyPr rtlCol="0" anchor="ctr"/>
-          <a:lstStyle/>
-          <a:p>
-            <a:pPr algn="ctr"/>
-          </a:p>
-        </p:txBody>
-      </p:sp>
-      <p:sp>
-        <p:nvSpPr>
-          <p:cNvPr id="46" name="TextBox 45"/>
-          <p:cNvSpPr txBox="1"/>
-          <p:nvPr/>
-        </p:nvSpPr>
-        <p:spPr>
-          <a:xfrm>
-            <a:off x="7298412" y="3282696"/>
-            <a:ext cx="502920" cy="201168"/>
-          </a:xfrm>
-          <a:prstGeom prst="rect">
-            <a:avLst/>
-          </a:prstGeom>
-          <a:noFill/>
-        </p:spPr>
-        <p:txBody>
-          <a:bodyPr wrap="none" lIns="18288" rIns="18288" tIns="18288" bIns="18288">
-            <a:spAutoFit/>
-          </a:bodyPr>
-          <a:lstStyle/>
-          <a:p>
-            <a:r>
-              <a:rPr sz="800" b="0">
-                <a:solidFill>
-                  <a:srgbClr val="1A2026"/>
-                </a:solidFill>
-                <a:latin typeface="Microsoft YaHei"/>
-              </a:rPr>
-              <a:t>1.75%</a:t>
-            </a:r>
-          </a:p>
-        </p:txBody>
-      </p:sp>
-      <p:sp>
-        <p:nvSpPr>
-          <p:cNvPr id="47" name="TextBox 46"/>
-          <p:cNvSpPr txBox="1"/>
-          <p:nvPr/>
-        </p:nvSpPr>
-        <p:spPr>
-          <a:xfrm>
-            <a:off x="7863840" y="1371600"/>
-            <a:ext cx="3383280" cy="219456"/>
-          </a:xfrm>
-          <a:prstGeom prst="rect">
-            <a:avLst/>
-          </a:prstGeom>
-          <a:noFill/>
-        </p:spPr>
-        <p:txBody>
-          <a:bodyPr wrap="none" lIns="18288" rIns="18288" tIns="18288" bIns="18288">
-            <a:spAutoFit/>
-          </a:bodyPr>
-          <a:lstStyle/>
-          <a:p>
-            <a:r>
-              <a:rPr sz="1100" b="1">
-                <a:solidFill>
-                  <a:srgbClr val="1A2026"/>
-                </a:solidFill>
-                <a:latin typeface="Microsoft YaHei"/>
-              </a:rPr>
-              <a:t>近1个月收益</a:t>
-            </a:r>
-          </a:p>
-        </p:txBody>
-      </p:sp>
-      <p:sp>
-        <p:nvSpPr>
-          <p:cNvPr id="48" name="TextBox 47"/>
-          <p:cNvSpPr txBox="1"/>
-          <p:nvPr/>
-        </p:nvSpPr>
-        <p:spPr>
-          <a:xfrm>
-            <a:off x="7863840" y="1737360"/>
-            <a:ext cx="1078992" cy="201168"/>
-          </a:xfrm>
-          <a:prstGeom prst="rect">
-            <a:avLst/>
-          </a:prstGeom>
-          <a:noFill/>
-        </p:spPr>
-        <p:txBody>
-          <a:bodyPr wrap="none" lIns="18288" rIns="18288" tIns="18288" bIns="18288">
-            <a:spAutoFit/>
-          </a:bodyPr>
-          <a:lstStyle/>
-          <a:p>
-            <a:r>
-              <a:rPr sz="800" b="0">
-                <a:solidFill>
-                  <a:srgbClr val="65707D"/>
-                </a:solidFill>
-                <a:latin typeface="Microsoft YaHei"/>
-              </a:rPr>
-              <a:t>华夏沪深300E</a:t>
-            </a:r>
-          </a:p>
-        </p:txBody>
-      </p:sp>
-      <p:sp>
-        <p:nvSpPr>
-          <p:cNvPr id="49" name="Rectangle 48"/>
-          <p:cNvSpPr/>
-          <p:nvPr/>
-        </p:nvSpPr>
-        <p:spPr>
-          <a:xfrm>
-            <a:off x="9646919" y="1810512"/>
-            <a:ext cx="9144" cy="118872"/>
-          </a:xfrm>
-          <a:prstGeom prst="rect">
-            <a:avLst/>
-          </a:prstGeom>
-          <a:solidFill>
-            <a:srgbClr val="DAD5C9"/>
-          </a:solidFill>
-          <a:ln>
-            <a:noFill/>
-          </a:ln>
-        </p:spPr>
-        <p:style>
-          <a:lnRef idx="1">
-            <a:schemeClr val="accent1"/>
-          </a:lnRef>
-          <a:fillRef idx="3">
-            <a:schemeClr val="accent1"/>
-          </a:fillRef>
-          <a:effectRef idx="2">
-            <a:schemeClr val="accent1"/>
-          </a:effectRef>
-          <a:fontRef idx="minor">
-            <a:schemeClr val="lt1"/>
-          </a:fontRef>
-        </p:style>
-        <p:txBody>
-          <a:bodyPr rtlCol="0" anchor="ctr"/>
-          <a:lstStyle/>
-          <a:p>
-            <a:pPr algn="ctr"/>
-          </a:p>
-        </p:txBody>
-      </p:sp>
-      <p:sp>
-        <p:nvSpPr>
-          <p:cNvPr id="50" name="Rectangle 49"/>
-          <p:cNvSpPr/>
-          <p:nvPr/>
-        </p:nvSpPr>
-        <p:spPr>
-          <a:xfrm>
-            <a:off x="8321040" y="1792224"/>
-            <a:ext cx="1325880" cy="146304"/>
-          </a:xfrm>
-          <a:prstGeom prst="rect">
-            <a:avLst/>
-          </a:prstGeom>
-          <a:solidFill>
-            <a:srgbClr val="BF4040"/>
-          </a:solidFill>
-          <a:ln>
-            <a:noFill/>
-          </a:ln>
-        </p:spPr>
-        <p:style>
-          <a:lnRef idx="1">
-            <a:schemeClr val="accent1"/>
-          </a:lnRef>
-          <a:fillRef idx="3">
-            <a:schemeClr val="accent1"/>
-          </a:fillRef>
-          <a:effectRef idx="2">
-            <a:schemeClr val="accent1"/>
-          </a:effectRef>
-          <a:fontRef idx="minor">
-            <a:schemeClr val="lt1"/>
-          </a:fontRef>
-        </p:style>
-        <p:txBody>
-          <a:bodyPr rtlCol="0" anchor="ctr"/>
-          <a:lstStyle/>
-          <a:p>
-            <a:pPr algn="ctr"/>
-          </a:p>
-        </p:txBody>
-      </p:sp>
-      <p:sp>
-        <p:nvSpPr>
-          <p:cNvPr id="51" name="TextBox 50"/>
-          <p:cNvSpPr txBox="1"/>
-          <p:nvPr/>
-        </p:nvSpPr>
-        <p:spPr>
-          <a:xfrm>
-            <a:off x="9692640" y="1746504"/>
-            <a:ext cx="502920" cy="201168"/>
-          </a:xfrm>
-          <a:prstGeom prst="rect">
-            <a:avLst/>
-          </a:prstGeom>
-          <a:noFill/>
-        </p:spPr>
-        <p:txBody>
-          <a:bodyPr wrap="none" lIns="18288" rIns="18288" tIns="18288" bIns="18288">
-            <a:spAutoFit/>
-          </a:bodyPr>
-          <a:lstStyle/>
-          <a:p>
-            <a:r>
-              <a:rPr sz="800" b="0">
-                <a:solidFill>
-                  <a:srgbClr val="1A2026"/>
-                </a:solidFill>
-                <a:latin typeface="Microsoft YaHei"/>
-              </a:rPr>
-              <a:t>-3.57%</a:t>
-            </a:r>
-          </a:p>
-        </p:txBody>
-      </p:sp>
-      <p:sp>
-        <p:nvSpPr>
-          <p:cNvPr id="52" name="TextBox 51"/>
-          <p:cNvSpPr txBox="1"/>
-          <p:nvPr/>
-        </p:nvSpPr>
-        <p:spPr>
-          <a:xfrm>
-            <a:off x="7863840" y="2121408"/>
-            <a:ext cx="1078992" cy="201168"/>
-          </a:xfrm>
-          <a:prstGeom prst="rect">
-            <a:avLst/>
-          </a:prstGeom>
-          <a:noFill/>
-        </p:spPr>
-        <p:txBody>
-          <a:bodyPr wrap="none" lIns="18288" rIns="18288" tIns="18288" bIns="18288">
-            <a:spAutoFit/>
-          </a:bodyPr>
-          <a:lstStyle/>
-          <a:p>
-            <a:r>
-              <a:rPr sz="800" b="0">
-                <a:solidFill>
-                  <a:srgbClr val="65707D"/>
-                </a:solidFill>
-                <a:latin typeface="Microsoft YaHei"/>
-              </a:rPr>
-              <a:t>富国红利精选QD</a:t>
-            </a:r>
-          </a:p>
-        </p:txBody>
-      </p:sp>
-      <p:sp>
-        <p:nvSpPr>
-          <p:cNvPr id="53" name="Rectangle 52"/>
-          <p:cNvSpPr/>
-          <p:nvPr/>
-        </p:nvSpPr>
-        <p:spPr>
-          <a:xfrm>
-            <a:off x="9646919" y="2194560"/>
-            <a:ext cx="9144" cy="118872"/>
-          </a:xfrm>
-          <a:prstGeom prst="rect">
-            <a:avLst/>
-          </a:prstGeom>
-          <a:solidFill>
-            <a:srgbClr val="DAD5C9"/>
-          </a:solidFill>
-          <a:ln>
-            <a:noFill/>
-          </a:ln>
-        </p:spPr>
-        <p:style>
-          <a:lnRef idx="1">
-            <a:schemeClr val="accent1"/>
-          </a:lnRef>
-          <a:fillRef idx="3">
-            <a:schemeClr val="accent1"/>
-          </a:fillRef>
-          <a:effectRef idx="2">
-            <a:schemeClr val="accent1"/>
-          </a:effectRef>
-          <a:fontRef idx="minor">
-            <a:schemeClr val="lt1"/>
-          </a:fontRef>
-        </p:style>
-        <p:txBody>
-          <a:bodyPr rtlCol="0" anchor="ctr"/>
-          <a:lstStyle/>
-          <a:p>
-            <a:pPr algn="ctr"/>
-          </a:p>
-        </p:txBody>
-      </p:sp>
-      <p:sp>
-        <p:nvSpPr>
-          <p:cNvPr id="54" name="Rectangle 53"/>
-          <p:cNvSpPr/>
-          <p:nvPr/>
-        </p:nvSpPr>
-        <p:spPr>
-          <a:xfrm>
-            <a:off x="9646919" y="2176272"/>
-            <a:ext cx="946783" cy="146304"/>
-          </a:xfrm>
-          <a:prstGeom prst="rect">
-            <a:avLst/>
-          </a:prstGeom>
-          <a:solidFill>
-            <a:srgbClr val="198974"/>
-          </a:solidFill>
-          <a:ln>
-            <a:noFill/>
-          </a:ln>
-        </p:spPr>
-        <p:style>
-          <a:lnRef idx="1">
-            <a:schemeClr val="accent1"/>
-          </a:lnRef>
-          <a:fillRef idx="3">
-            <a:schemeClr val="accent1"/>
-          </a:fillRef>
-          <a:effectRef idx="2">
-            <a:schemeClr val="accent1"/>
-          </a:effectRef>
-          <a:fontRef idx="minor">
-            <a:schemeClr val="lt1"/>
-          </a:fontRef>
-        </p:style>
-        <p:txBody>
-          <a:bodyPr rtlCol="0" anchor="ctr"/>
-          <a:lstStyle/>
-          <a:p>
-            <a:pPr algn="ctr"/>
-          </a:p>
-        </p:txBody>
-      </p:sp>
-      <p:sp>
-        <p:nvSpPr>
-          <p:cNvPr id="55" name="TextBox 54"/>
-          <p:cNvSpPr txBox="1"/>
-          <p:nvPr/>
-        </p:nvSpPr>
-        <p:spPr>
-          <a:xfrm>
-            <a:off x="10639423" y="2130552"/>
-            <a:ext cx="502920" cy="201168"/>
-          </a:xfrm>
-          <a:prstGeom prst="rect">
-            <a:avLst/>
-          </a:prstGeom>
-          <a:noFill/>
-        </p:spPr>
-        <p:txBody>
-          <a:bodyPr wrap="none" lIns="18288" rIns="18288" tIns="18288" bIns="18288">
-            <a:spAutoFit/>
-          </a:bodyPr>
-          <a:lstStyle/>
-          <a:p>
-            <a:r>
-              <a:rPr sz="800" b="0">
-                <a:solidFill>
-                  <a:srgbClr val="1A2026"/>
-                </a:solidFill>
-                <a:latin typeface="Microsoft YaHei"/>
-              </a:rPr>
-              <a:t>2.55%</a:t>
-            </a:r>
-          </a:p>
-        </p:txBody>
-      </p:sp>
-      <p:sp>
-        <p:nvSpPr>
-          <p:cNvPr id="56" name="TextBox 55"/>
-          <p:cNvSpPr txBox="1"/>
-          <p:nvPr/>
-        </p:nvSpPr>
-        <p:spPr>
-          <a:xfrm>
-            <a:off x="7863840" y="2505456"/>
-            <a:ext cx="1078992" cy="201168"/>
-          </a:xfrm>
-          <a:prstGeom prst="rect">
-            <a:avLst/>
-          </a:prstGeom>
-          <a:noFill/>
-        </p:spPr>
-        <p:txBody>
-          <a:bodyPr wrap="none" lIns="18288" rIns="18288" tIns="18288" bIns="18288">
-            <a:spAutoFit/>
-          </a:bodyPr>
-          <a:lstStyle/>
-          <a:p>
-            <a:r>
-              <a:rPr sz="800" b="0">
-                <a:solidFill>
-                  <a:srgbClr val="65707D"/>
-                </a:solidFill>
-                <a:latin typeface="Microsoft YaHei"/>
-              </a:rPr>
-              <a:t>纳斯达克100指</a:t>
-            </a:r>
-          </a:p>
-        </p:txBody>
-      </p:sp>
-      <p:sp>
-        <p:nvSpPr>
-          <p:cNvPr id="57" name="Rectangle 56"/>
-          <p:cNvSpPr/>
-          <p:nvPr/>
-        </p:nvSpPr>
-        <p:spPr>
-          <a:xfrm>
-            <a:off x="9646919" y="2578608"/>
-            <a:ext cx="9144" cy="118872"/>
-          </a:xfrm>
-          <a:prstGeom prst="rect">
-            <a:avLst/>
-          </a:prstGeom>
-          <a:solidFill>
-            <a:srgbClr val="DAD5C9"/>
-          </a:solidFill>
-          <a:ln>
-            <a:noFill/>
-          </a:ln>
-        </p:spPr>
-        <p:style>
-          <a:lnRef idx="1">
-            <a:schemeClr val="accent1"/>
-          </a:lnRef>
-          <a:fillRef idx="3">
-            <a:schemeClr val="accent1"/>
-          </a:fillRef>
-          <a:effectRef idx="2">
-            <a:schemeClr val="accent1"/>
-          </a:effectRef>
-          <a:fontRef idx="minor">
-            <a:schemeClr val="lt1"/>
-          </a:fontRef>
-        </p:style>
-        <p:txBody>
-          <a:bodyPr rtlCol="0" anchor="ctr"/>
-          <a:lstStyle/>
-          <a:p>
-            <a:pPr algn="ctr"/>
-          </a:p>
-        </p:txBody>
-      </p:sp>
-      <p:sp>
-        <p:nvSpPr>
-          <p:cNvPr id="58" name="Rectangle 57"/>
-          <p:cNvSpPr/>
-          <p:nvPr/>
-        </p:nvSpPr>
-        <p:spPr>
-          <a:xfrm>
-            <a:off x="8595986" y="2560320"/>
-            <a:ext cx="1050933" cy="146304"/>
-          </a:xfrm>
-          <a:prstGeom prst="rect">
-            <a:avLst/>
-          </a:prstGeom>
-          <a:solidFill>
-            <a:srgbClr val="BF4040"/>
-          </a:solidFill>
-          <a:ln>
-            <a:noFill/>
-          </a:ln>
-        </p:spPr>
-        <p:style>
-          <a:lnRef idx="1">
-            <a:schemeClr val="accent1"/>
-          </a:lnRef>
-          <a:fillRef idx="3">
-            <a:schemeClr val="accent1"/>
-          </a:fillRef>
-          <a:effectRef idx="2">
-            <a:schemeClr val="accent1"/>
-          </a:effectRef>
-          <a:fontRef idx="minor">
-            <a:schemeClr val="lt1"/>
-          </a:fontRef>
-        </p:style>
-        <p:txBody>
-          <a:bodyPr rtlCol="0" anchor="ctr"/>
-          <a:lstStyle/>
-          <a:p>
-            <a:pPr algn="ctr"/>
-          </a:p>
-        </p:txBody>
-      </p:sp>
-      <p:sp>
-        <p:nvSpPr>
-          <p:cNvPr id="59" name="TextBox 58"/>
-          <p:cNvSpPr txBox="1"/>
-          <p:nvPr/>
-        </p:nvSpPr>
-        <p:spPr>
-          <a:xfrm>
-            <a:off x="9692640" y="2514600"/>
-            <a:ext cx="502920" cy="201168"/>
-          </a:xfrm>
-          <a:prstGeom prst="rect">
-            <a:avLst/>
-          </a:prstGeom>
-          <a:noFill/>
-        </p:spPr>
-        <p:txBody>
-          <a:bodyPr wrap="none" lIns="18288" rIns="18288" tIns="18288" bIns="18288">
-            <a:spAutoFit/>
-          </a:bodyPr>
-          <a:lstStyle/>
-          <a:p>
-            <a:r>
-              <a:rPr sz="800" b="0">
-                <a:solidFill>
-                  <a:srgbClr val="1A2026"/>
-                </a:solidFill>
-                <a:latin typeface="Microsoft YaHei"/>
-              </a:rPr>
-              <a:t>-2.83%</a:t>
-            </a:r>
-          </a:p>
-        </p:txBody>
-      </p:sp>
-      <p:sp>
-        <p:nvSpPr>
-          <p:cNvPr id="60" name="TextBox 59"/>
-          <p:cNvSpPr txBox="1"/>
-          <p:nvPr/>
-        </p:nvSpPr>
-        <p:spPr>
-          <a:xfrm>
-            <a:off x="7863840" y="2889503"/>
-            <a:ext cx="1078992" cy="201168"/>
-          </a:xfrm>
-          <a:prstGeom prst="rect">
-            <a:avLst/>
-          </a:prstGeom>
-          <a:noFill/>
-        </p:spPr>
-        <p:txBody>
-          <a:bodyPr wrap="none" lIns="18288" rIns="18288" tIns="18288" bIns="18288">
-            <a:spAutoFit/>
-          </a:bodyPr>
-          <a:lstStyle/>
-          <a:p>
-            <a:r>
-              <a:rPr sz="800" b="0">
-                <a:solidFill>
-                  <a:srgbClr val="65707D"/>
-                </a:solidFill>
-                <a:latin typeface="Microsoft YaHei"/>
-              </a:rPr>
-              <a:t>兴全安泰积极养老</a:t>
-            </a:r>
-          </a:p>
-        </p:txBody>
-      </p:sp>
-      <p:sp>
-        <p:nvSpPr>
-          <p:cNvPr id="61" name="Rectangle 60"/>
-          <p:cNvSpPr/>
-          <p:nvPr/>
-        </p:nvSpPr>
-        <p:spPr>
-          <a:xfrm>
-            <a:off x="9646919" y="2962656"/>
-            <a:ext cx="9144" cy="118872"/>
-          </a:xfrm>
-          <a:prstGeom prst="rect">
-            <a:avLst/>
-          </a:prstGeom>
-          <a:solidFill>
-            <a:srgbClr val="DAD5C9"/>
-          </a:solidFill>
-          <a:ln>
-            <a:noFill/>
-          </a:ln>
-        </p:spPr>
-        <p:style>
-          <a:lnRef idx="1">
-            <a:schemeClr val="accent1"/>
-          </a:lnRef>
-          <a:fillRef idx="3">
-            <a:schemeClr val="accent1"/>
-          </a:fillRef>
-          <a:effectRef idx="2">
-            <a:schemeClr val="accent1"/>
-          </a:effectRef>
-          <a:fontRef idx="minor">
-            <a:schemeClr val="lt1"/>
-          </a:fontRef>
-        </p:style>
-        <p:txBody>
-          <a:bodyPr rtlCol="0" anchor="ctr"/>
-          <a:lstStyle/>
-          <a:p>
-            <a:pPr algn="ctr"/>
-          </a:p>
-        </p:txBody>
-      </p:sp>
-      <p:sp>
-        <p:nvSpPr>
-          <p:cNvPr id="62" name="Rectangle 61"/>
-          <p:cNvSpPr/>
-          <p:nvPr/>
-        </p:nvSpPr>
-        <p:spPr>
-          <a:xfrm>
-            <a:off x="8800471" y="2944368"/>
-            <a:ext cx="846448" cy="146304"/>
-          </a:xfrm>
-          <a:prstGeom prst="rect">
-            <a:avLst/>
-          </a:prstGeom>
-          <a:solidFill>
-            <a:srgbClr val="BF4040"/>
-          </a:solidFill>
-          <a:ln>
-            <a:noFill/>
-          </a:ln>
-        </p:spPr>
-        <p:style>
-          <a:lnRef idx="1">
-            <a:schemeClr val="accent1"/>
-          </a:lnRef>
-          <a:fillRef idx="3">
-            <a:schemeClr val="accent1"/>
-          </a:fillRef>
-          <a:effectRef idx="2">
-            <a:schemeClr val="accent1"/>
-          </a:effectRef>
-          <a:fontRef idx="minor">
-            <a:schemeClr val="lt1"/>
-          </a:fontRef>
-        </p:style>
-        <p:txBody>
-          <a:bodyPr rtlCol="0" anchor="ctr"/>
-          <a:lstStyle/>
-          <a:p>
-            <a:pPr algn="ctr"/>
-          </a:p>
-        </p:txBody>
-      </p:sp>
-      <p:sp>
-        <p:nvSpPr>
-          <p:cNvPr id="63" name="TextBox 62"/>
-          <p:cNvSpPr txBox="1"/>
-          <p:nvPr/>
-        </p:nvSpPr>
-        <p:spPr>
-          <a:xfrm>
-            <a:off x="9692640" y="2898648"/>
-            <a:ext cx="502920" cy="201168"/>
-          </a:xfrm>
-          <a:prstGeom prst="rect">
-            <a:avLst/>
-          </a:prstGeom>
-          <a:noFill/>
-        </p:spPr>
-        <p:txBody>
-          <a:bodyPr wrap="none" lIns="18288" rIns="18288" tIns="18288" bIns="18288">
-            <a:spAutoFit/>
-          </a:bodyPr>
-          <a:lstStyle/>
-          <a:p>
-            <a:r>
-              <a:rPr sz="800" b="0">
-                <a:solidFill>
-                  <a:srgbClr val="1A2026"/>
-                </a:solidFill>
-                <a:latin typeface="Microsoft YaHei"/>
-              </a:rPr>
-              <a:t>-2.28%</a:t>
-            </a:r>
-          </a:p>
-        </p:txBody>
-      </p:sp>
-      <p:sp>
-        <p:nvSpPr>
-          <p:cNvPr id="64" name="TextBox 63"/>
-          <p:cNvSpPr txBox="1"/>
-          <p:nvPr/>
-        </p:nvSpPr>
-        <p:spPr>
-          <a:xfrm>
-            <a:off x="7863840" y="3273551"/>
-            <a:ext cx="1078992" cy="201168"/>
-          </a:xfrm>
-          <a:prstGeom prst="rect">
-            <a:avLst/>
-          </a:prstGeom>
-          <a:noFill/>
-        </p:spPr>
-        <p:txBody>
-          <a:bodyPr wrap="none" lIns="18288" rIns="18288" tIns="18288" bIns="18288">
-            <a:spAutoFit/>
-          </a:bodyPr>
-          <a:lstStyle/>
-          <a:p>
-            <a:r>
-              <a:rPr sz="800" b="0">
-                <a:solidFill>
-                  <a:srgbClr val="65707D"/>
-                </a:solidFill>
-                <a:latin typeface="Microsoft YaHei"/>
-              </a:rPr>
-              <a:t>易方达全球优质企</a:t>
-            </a:r>
-          </a:p>
-        </p:txBody>
-      </p:sp>
-      <p:sp>
-        <p:nvSpPr>
-          <p:cNvPr id="65" name="Rectangle 64"/>
-          <p:cNvSpPr/>
-          <p:nvPr/>
-        </p:nvSpPr>
-        <p:spPr>
-          <a:xfrm>
-            <a:off x="9646919" y="3346703"/>
-            <a:ext cx="9144" cy="118872"/>
-          </a:xfrm>
-          <a:prstGeom prst="rect">
-            <a:avLst/>
-          </a:prstGeom>
-          <a:solidFill>
-            <a:srgbClr val="DAD5C9"/>
-          </a:solidFill>
-          <a:ln>
-            <a:noFill/>
-          </a:ln>
-        </p:spPr>
-        <p:style>
-          <a:lnRef idx="1">
-            <a:schemeClr val="accent1"/>
-          </a:lnRef>
-          <a:fillRef idx="3">
-            <a:schemeClr val="accent1"/>
-          </a:fillRef>
-          <a:effectRef idx="2">
-            <a:schemeClr val="accent1"/>
-          </a:effectRef>
-          <a:fontRef idx="minor">
-            <a:schemeClr val="lt1"/>
-          </a:fontRef>
-        </p:style>
-        <p:txBody>
-          <a:bodyPr rtlCol="0" anchor="ctr"/>
-          <a:lstStyle/>
-          <a:p>
-            <a:pPr algn="ctr"/>
-          </a:p>
-        </p:txBody>
-      </p:sp>
-      <p:sp>
-        <p:nvSpPr>
-          <p:cNvPr id="66" name="Rectangle 65"/>
-          <p:cNvSpPr/>
-          <p:nvPr/>
-        </p:nvSpPr>
-        <p:spPr>
-          <a:xfrm>
-            <a:off x="8622297" y="3328415"/>
-            <a:ext cx="1024622" cy="146304"/>
-          </a:xfrm>
-          <a:prstGeom prst="rect">
-            <a:avLst/>
-          </a:prstGeom>
-          <a:solidFill>
-            <a:srgbClr val="BF4040"/>
-          </a:solidFill>
-          <a:ln>
-            <a:noFill/>
-          </a:ln>
-        </p:spPr>
-        <p:style>
-          <a:lnRef idx="1">
-            <a:schemeClr val="accent1"/>
-          </a:lnRef>
-          <a:fillRef idx="3">
-            <a:schemeClr val="accent1"/>
-          </a:fillRef>
-          <a:effectRef idx="2">
-            <a:schemeClr val="accent1"/>
-          </a:effectRef>
-          <a:fontRef idx="minor">
-            <a:schemeClr val="lt1"/>
-          </a:fontRef>
-        </p:style>
-        <p:txBody>
-          <a:bodyPr rtlCol="0" anchor="ctr"/>
-          <a:lstStyle/>
-          <a:p>
-            <a:pPr algn="ctr"/>
-          </a:p>
-        </p:txBody>
-      </p:sp>
-      <p:sp>
-        <p:nvSpPr>
           <p:cNvPr id="67" name="TextBox 66"/>
           <p:cNvSpPr txBox="1"/>
           <p:nvPr/>
@@ -6523,7 +6523,7 @@
                 </a:solidFill>
                 <a:latin typeface="Microsoft YaHei"/>
               </a:rPr>
-              <a:t>-2.76%</a:t>
+              <a:t>-5.97%</a:t>
             </a:r>
           </a:p>
         </p:txBody>
@@ -6761,7 +6761,7 @@
                 </a:solidFill>
                 <a:latin typeface="Microsoft YaHei"/>
               </a:rPr>
-              <a:t>1.7157</a:t>
+              <a:t>1.7050</a:t>
             </a:r>
           </a:p>
         </p:txBody>
@@ -6795,7 +6795,7 @@
                 </a:solidFill>
                 <a:latin typeface="Microsoft YaHei"/>
               </a:rPr>
-              <a:t>2026-09-14</a:t>
+              <a:t>2026-09-15</a:t>
             </a:r>
           </a:p>
         </p:txBody>
@@ -6897,7 +6897,7 @@
                 </a:solidFill>
                 <a:latin typeface="Microsoft YaHei"/>
               </a:rPr>
-              <a:t>1.8952</a:t>
+              <a:t>1.8893</a:t>
             </a:r>
           </a:p>
         </p:txBody>
@@ -6931,7 +6931,7 @@
                 </a:solidFill>
                 <a:latin typeface="Microsoft YaHei"/>
               </a:rPr>
-              <a:t>2026-09-11</a:t>
+              <a:t>2026-09-14</a:t>
             </a:r>
           </a:p>
         </p:txBody>
@@ -7033,7 +7033,7 @@
                 </a:solidFill>
                 <a:latin typeface="Microsoft YaHei"/>
               </a:rPr>
-              <a:t>2.0163</a:t>
+              <a:t>1.9999</a:t>
             </a:r>
           </a:p>
         </p:txBody>
@@ -7067,7 +7067,7 @@
                 </a:solidFill>
                 <a:latin typeface="Microsoft YaHei"/>
               </a:rPr>
-              <a:t>2026-09-11</a:t>
+              <a:t>2026-09-14</a:t>
             </a:r>
           </a:p>
         </p:txBody>
@@ -7169,7 +7169,7 @@
                 </a:solidFill>
                 <a:latin typeface="Microsoft YaHei"/>
               </a:rPr>
-              <a:t>1.2352</a:t>
+              <a:t>1.2250</a:t>
             </a:r>
           </a:p>
         </p:txBody>
@@ -7203,7 +7203,7 @@
                 </a:solidFill>
                 <a:latin typeface="Microsoft YaHei"/>
               </a:rPr>
-              <a:t>2026-09-10</a:t>
+              <a:t>2026-09-11</a:t>
             </a:r>
           </a:p>
         </p:txBody>
@@ -7305,7 +7305,7 @@
                 </a:solidFill>
                 <a:latin typeface="Microsoft YaHei"/>
               </a:rPr>
-              <a:t>2.0308</a:t>
+              <a:t>1.9824</a:t>
             </a:r>
           </a:p>
         </p:txBody>
@@ -7339,7 +7339,7 @@
                 </a:solidFill>
                 <a:latin typeface="Microsoft YaHei"/>
               </a:rPr>
-              <a:t>2026-09-11</a:t>
+              <a:t>2026-09-14</a:t>
             </a:r>
           </a:p>
         </p:txBody>
@@ -7626,7 +7626,7 @@
         <p:spPr>
           <a:xfrm>
             <a:off x="2788920" y="1737360"/>
-            <a:ext cx="943578" cy="201168"/>
+            <a:ext cx="990442" cy="201168"/>
           </a:xfrm>
           <a:prstGeom prst="rect">
             <a:avLst/>
@@ -7689,7 +7689,7 @@
                 </a:solidFill>
                 <a:latin typeface="Microsoft YaHei"/>
               </a:rPr>
-              <a:t>-9.92%</a:t>
+              <a:t>-10.48%</a:t>
             </a:r>
           </a:p>
         </p:txBody>
@@ -7737,7 +7737,673 @@
         <p:spPr>
           <a:xfrm>
             <a:off x="8549640" y="1737360"/>
-            <a:ext cx="1255808" cy="201168"/>
+            <a:ext cx="1264344" cy="201168"/>
+          </a:xfrm>
+          <a:prstGeom prst="rect">
+            <a:avLst/>
+          </a:prstGeom>
+          <a:solidFill>
+            <a:srgbClr val="BF4040"/>
+          </a:solidFill>
+          <a:ln>
+            <a:noFill/>
+          </a:ln>
+        </p:spPr>
+        <p:style>
+          <a:lnRef idx="1">
+            <a:schemeClr val="accent1"/>
+          </a:lnRef>
+          <a:fillRef idx="3">
+            <a:schemeClr val="accent1"/>
+          </a:fillRef>
+          <a:effectRef idx="2">
+            <a:schemeClr val="accent1"/>
+          </a:effectRef>
+          <a:fontRef idx="minor">
+            <a:schemeClr val="lt1"/>
+          </a:fontRef>
+        </p:style>
+        <p:txBody>
+          <a:bodyPr rtlCol="0" anchor="ctr"/>
+          <a:lstStyle/>
+          <a:p>
+            <a:pPr algn="ctr"/>
+          </a:p>
+        </p:txBody>
+      </p:sp>
+      <p:sp>
+        <p:nvSpPr>
+          <p:cNvPr id="12" name="TextBox 11"/>
+          <p:cNvSpPr txBox="1"/>
+          <p:nvPr/>
+        </p:nvSpPr>
+        <p:spPr>
+          <a:xfrm>
+            <a:off x="11045952" y="1719072"/>
+            <a:ext cx="685800" cy="219456"/>
+          </a:xfrm>
+          <a:prstGeom prst="rect">
+            <a:avLst/>
+          </a:prstGeom>
+          <a:noFill/>
+        </p:spPr>
+        <p:txBody>
+          <a:bodyPr wrap="none" lIns="18288" rIns="18288" tIns="18288" bIns="18288">
+            <a:spAutoFit/>
+          </a:bodyPr>
+          <a:lstStyle/>
+          <a:p>
+            <a:r>
+              <a:rPr sz="800" b="0">
+                <a:solidFill>
+                  <a:srgbClr val="1A2026"/>
+                </a:solidFill>
+                <a:latin typeface="Microsoft YaHei"/>
+              </a:rPr>
+              <a:t>20.31%</a:t>
+            </a:r>
+          </a:p>
+        </p:txBody>
+      </p:sp>
+      <p:sp>
+        <p:nvSpPr>
+          <p:cNvPr id="13" name="TextBox 12"/>
+          <p:cNvSpPr txBox="1"/>
+          <p:nvPr/>
+        </p:nvSpPr>
+        <p:spPr>
+          <a:xfrm>
+            <a:off x="640080" y="2313432"/>
+            <a:ext cx="2057400" cy="219456"/>
+          </a:xfrm>
+          <a:prstGeom prst="rect">
+            <a:avLst/>
+          </a:prstGeom>
+          <a:noFill/>
+        </p:spPr>
+        <p:txBody>
+          <a:bodyPr wrap="none" lIns="18288" rIns="18288" tIns="18288" bIns="18288">
+            <a:spAutoFit/>
+          </a:bodyPr>
+          <a:lstStyle/>
+          <a:p>
+            <a:r>
+              <a:rPr sz="900" b="0">
+                <a:solidFill>
+                  <a:srgbClr val="1A2026"/>
+                </a:solidFill>
+                <a:latin typeface="Microsoft YaHei"/>
+              </a:rPr>
+              <a:t>富国红利精选QDII</a:t>
+            </a:r>
+          </a:p>
+        </p:txBody>
+      </p:sp>
+      <p:sp>
+        <p:nvSpPr>
+          <p:cNvPr id="14" name="Rectangle 13"/>
+          <p:cNvSpPr/>
+          <p:nvPr/>
+        </p:nvSpPr>
+        <p:spPr>
+          <a:xfrm>
+            <a:off x="2788920" y="2331720"/>
+            <a:ext cx="1441859" cy="201168"/>
+          </a:xfrm>
+          <a:prstGeom prst="rect">
+            <a:avLst/>
+          </a:prstGeom>
+          <a:solidFill>
+            <a:srgbClr val="BF4040"/>
+          </a:solidFill>
+          <a:ln>
+            <a:noFill/>
+          </a:ln>
+        </p:spPr>
+        <p:style>
+          <a:lnRef idx="1">
+            <a:schemeClr val="accent1"/>
+          </a:lnRef>
+          <a:fillRef idx="3">
+            <a:schemeClr val="accent1"/>
+          </a:fillRef>
+          <a:effectRef idx="2">
+            <a:schemeClr val="accent1"/>
+          </a:effectRef>
+          <a:fontRef idx="minor">
+            <a:schemeClr val="lt1"/>
+          </a:fontRef>
+        </p:style>
+        <p:txBody>
+          <a:bodyPr rtlCol="0" anchor="ctr"/>
+          <a:lstStyle/>
+          <a:p>
+            <a:pPr algn="ctr"/>
+          </a:p>
+        </p:txBody>
+      </p:sp>
+      <p:sp>
+        <p:nvSpPr>
+          <p:cNvPr id="15" name="TextBox 14"/>
+          <p:cNvSpPr txBox="1"/>
+          <p:nvPr/>
+        </p:nvSpPr>
+        <p:spPr>
+          <a:xfrm>
+            <a:off x="5285232" y="2313432"/>
+            <a:ext cx="685800" cy="219456"/>
+          </a:xfrm>
+          <a:prstGeom prst="rect">
+            <a:avLst/>
+          </a:prstGeom>
+          <a:noFill/>
+        </p:spPr>
+        <p:txBody>
+          <a:bodyPr wrap="none" lIns="18288" rIns="18288" tIns="18288" bIns="18288">
+            <a:spAutoFit/>
+          </a:bodyPr>
+          <a:lstStyle/>
+          <a:p>
+            <a:r>
+              <a:rPr sz="800" b="0">
+                <a:solidFill>
+                  <a:srgbClr val="1A2026"/>
+                </a:solidFill>
+                <a:latin typeface="Microsoft YaHei"/>
+              </a:rPr>
+              <a:t>-15.26%</a:t>
+            </a:r>
+          </a:p>
+        </p:txBody>
+      </p:sp>
+      <p:sp>
+        <p:nvSpPr>
+          <p:cNvPr id="16" name="TextBox 15"/>
+          <p:cNvSpPr txBox="1"/>
+          <p:nvPr/>
+        </p:nvSpPr>
+        <p:spPr>
+          <a:xfrm>
+            <a:off x="6400800" y="2313432"/>
+            <a:ext cx="2057400" cy="219456"/>
+          </a:xfrm>
+          <a:prstGeom prst="rect">
+            <a:avLst/>
+          </a:prstGeom>
+          <a:noFill/>
+        </p:spPr>
+        <p:txBody>
+          <a:bodyPr wrap="none" lIns="18288" rIns="18288" tIns="18288" bIns="18288">
+            <a:spAutoFit/>
+          </a:bodyPr>
+          <a:lstStyle/>
+          <a:p>
+            <a:r>
+              <a:rPr sz="900" b="0">
+                <a:solidFill>
+                  <a:srgbClr val="1A2026"/>
+                </a:solidFill>
+                <a:latin typeface="Microsoft YaHei"/>
+              </a:rPr>
+              <a:t>富国红利精选QDII</a:t>
+            </a:r>
+          </a:p>
+        </p:txBody>
+      </p:sp>
+      <p:sp>
+        <p:nvSpPr>
+          <p:cNvPr id="17" name="Rectangle 16"/>
+          <p:cNvSpPr/>
+          <p:nvPr/>
+        </p:nvSpPr>
+        <p:spPr>
+          <a:xfrm>
+            <a:off x="8549640" y="2331720"/>
+            <a:ext cx="790120" cy="201168"/>
+          </a:xfrm>
+          <a:prstGeom prst="rect">
+            <a:avLst/>
+          </a:prstGeom>
+          <a:solidFill>
+            <a:srgbClr val="BF4040"/>
+          </a:solidFill>
+          <a:ln>
+            <a:noFill/>
+          </a:ln>
+        </p:spPr>
+        <p:style>
+          <a:lnRef idx="1">
+            <a:schemeClr val="accent1"/>
+          </a:lnRef>
+          <a:fillRef idx="3">
+            <a:schemeClr val="accent1"/>
+          </a:fillRef>
+          <a:effectRef idx="2">
+            <a:schemeClr val="accent1"/>
+          </a:effectRef>
+          <a:fontRef idx="minor">
+            <a:schemeClr val="lt1"/>
+          </a:fontRef>
+        </p:style>
+        <p:txBody>
+          <a:bodyPr rtlCol="0" anchor="ctr"/>
+          <a:lstStyle/>
+          <a:p>
+            <a:pPr algn="ctr"/>
+          </a:p>
+        </p:txBody>
+      </p:sp>
+      <p:sp>
+        <p:nvSpPr>
+          <p:cNvPr id="18" name="TextBox 17"/>
+          <p:cNvSpPr txBox="1"/>
+          <p:nvPr/>
+        </p:nvSpPr>
+        <p:spPr>
+          <a:xfrm>
+            <a:off x="11045952" y="2313432"/>
+            <a:ext cx="685800" cy="219456"/>
+          </a:xfrm>
+          <a:prstGeom prst="rect">
+            <a:avLst/>
+          </a:prstGeom>
+          <a:noFill/>
+        </p:spPr>
+        <p:txBody>
+          <a:bodyPr wrap="none" lIns="18288" rIns="18288" tIns="18288" bIns="18288">
+            <a:spAutoFit/>
+          </a:bodyPr>
+          <a:lstStyle/>
+          <a:p>
+            <a:r>
+              <a:rPr sz="800" b="0">
+                <a:solidFill>
+                  <a:srgbClr val="1A2026"/>
+                </a:solidFill>
+                <a:latin typeface="Microsoft YaHei"/>
+              </a:rPr>
+              <a:t>12.69%</a:t>
+            </a:r>
+          </a:p>
+        </p:txBody>
+      </p:sp>
+      <p:sp>
+        <p:nvSpPr>
+          <p:cNvPr id="19" name="TextBox 18"/>
+          <p:cNvSpPr txBox="1"/>
+          <p:nvPr/>
+        </p:nvSpPr>
+        <p:spPr>
+          <a:xfrm>
+            <a:off x="640080" y="2907792"/>
+            <a:ext cx="2057400" cy="219456"/>
+          </a:xfrm>
+          <a:prstGeom prst="rect">
+            <a:avLst/>
+          </a:prstGeom>
+          <a:noFill/>
+        </p:spPr>
+        <p:txBody>
+          <a:bodyPr wrap="none" lIns="18288" rIns="18288" tIns="18288" bIns="18288">
+            <a:spAutoFit/>
+          </a:bodyPr>
+          <a:lstStyle/>
+          <a:p>
+            <a:r>
+              <a:rPr sz="900" b="0">
+                <a:solidFill>
+                  <a:srgbClr val="1A2026"/>
+                </a:solidFill>
+                <a:latin typeface="Microsoft YaHei"/>
+              </a:rPr>
+              <a:t>纳斯达克100指数Q</a:t>
+            </a:r>
+          </a:p>
+        </p:txBody>
+      </p:sp>
+      <p:sp>
+        <p:nvSpPr>
+          <p:cNvPr id="20" name="Rectangle 19"/>
+          <p:cNvSpPr/>
+          <p:nvPr/>
+        </p:nvSpPr>
+        <p:spPr>
+          <a:xfrm>
+            <a:off x="2788920" y="2926080"/>
+            <a:ext cx="990097" cy="201168"/>
+          </a:xfrm>
+          <a:prstGeom prst="rect">
+            <a:avLst/>
+          </a:prstGeom>
+          <a:solidFill>
+            <a:srgbClr val="BF4040"/>
+          </a:solidFill>
+          <a:ln>
+            <a:noFill/>
+          </a:ln>
+        </p:spPr>
+        <p:style>
+          <a:lnRef idx="1">
+            <a:schemeClr val="accent1"/>
+          </a:lnRef>
+          <a:fillRef idx="3">
+            <a:schemeClr val="accent1"/>
+          </a:fillRef>
+          <a:effectRef idx="2">
+            <a:schemeClr val="accent1"/>
+          </a:effectRef>
+          <a:fontRef idx="minor">
+            <a:schemeClr val="lt1"/>
+          </a:fontRef>
+        </p:style>
+        <p:txBody>
+          <a:bodyPr rtlCol="0" anchor="ctr"/>
+          <a:lstStyle/>
+          <a:p>
+            <a:pPr algn="ctr"/>
+          </a:p>
+        </p:txBody>
+      </p:sp>
+      <p:sp>
+        <p:nvSpPr>
+          <p:cNvPr id="21" name="TextBox 20"/>
+          <p:cNvSpPr txBox="1"/>
+          <p:nvPr/>
+        </p:nvSpPr>
+        <p:spPr>
+          <a:xfrm>
+            <a:off x="5285232" y="2907792"/>
+            <a:ext cx="685800" cy="219456"/>
+          </a:xfrm>
+          <a:prstGeom prst="rect">
+            <a:avLst/>
+          </a:prstGeom>
+          <a:noFill/>
+        </p:spPr>
+        <p:txBody>
+          <a:bodyPr wrap="none" lIns="18288" rIns="18288" tIns="18288" bIns="18288">
+            <a:spAutoFit/>
+          </a:bodyPr>
+          <a:lstStyle/>
+          <a:p>
+            <a:r>
+              <a:rPr sz="800" b="0">
+                <a:solidFill>
+                  <a:srgbClr val="1A2026"/>
+                </a:solidFill>
+                <a:latin typeface="Microsoft YaHei"/>
+              </a:rPr>
+              <a:t>-10.48%</a:t>
+            </a:r>
+          </a:p>
+        </p:txBody>
+      </p:sp>
+      <p:sp>
+        <p:nvSpPr>
+          <p:cNvPr id="22" name="TextBox 21"/>
+          <p:cNvSpPr txBox="1"/>
+          <p:nvPr/>
+        </p:nvSpPr>
+        <p:spPr>
+          <a:xfrm>
+            <a:off x="6400800" y="2907792"/>
+            <a:ext cx="2057400" cy="219456"/>
+          </a:xfrm>
+          <a:prstGeom prst="rect">
+            <a:avLst/>
+          </a:prstGeom>
+          <a:noFill/>
+        </p:spPr>
+        <p:txBody>
+          <a:bodyPr wrap="none" lIns="18288" rIns="18288" tIns="18288" bIns="18288">
+            <a:spAutoFit/>
+          </a:bodyPr>
+          <a:lstStyle/>
+          <a:p>
+            <a:r>
+              <a:rPr sz="900" b="0">
+                <a:solidFill>
+                  <a:srgbClr val="1A2026"/>
+                </a:solidFill>
+                <a:latin typeface="Microsoft YaHei"/>
+              </a:rPr>
+              <a:t>纳斯达克100指数Q</a:t>
+            </a:r>
+          </a:p>
+        </p:txBody>
+      </p:sp>
+      <p:sp>
+        <p:nvSpPr>
+          <p:cNvPr id="23" name="Rectangle 22"/>
+          <p:cNvSpPr/>
+          <p:nvPr/>
+        </p:nvSpPr>
+        <p:spPr>
+          <a:xfrm>
+            <a:off x="8549640" y="2926080"/>
+            <a:ext cx="1307900" cy="201168"/>
+          </a:xfrm>
+          <a:prstGeom prst="rect">
+            <a:avLst/>
+          </a:prstGeom>
+          <a:solidFill>
+            <a:srgbClr val="BF4040"/>
+          </a:solidFill>
+          <a:ln>
+            <a:noFill/>
+          </a:ln>
+        </p:spPr>
+        <p:style>
+          <a:lnRef idx="1">
+            <a:schemeClr val="accent1"/>
+          </a:lnRef>
+          <a:fillRef idx="3">
+            <a:schemeClr val="accent1"/>
+          </a:fillRef>
+          <a:effectRef idx="2">
+            <a:schemeClr val="accent1"/>
+          </a:effectRef>
+          <a:fontRef idx="minor">
+            <a:schemeClr val="lt1"/>
+          </a:fontRef>
+        </p:style>
+        <p:txBody>
+          <a:bodyPr rtlCol="0" anchor="ctr"/>
+          <a:lstStyle/>
+          <a:p>
+            <a:pPr algn="ctr"/>
+          </a:p>
+        </p:txBody>
+      </p:sp>
+      <p:sp>
+        <p:nvSpPr>
+          <p:cNvPr id="24" name="TextBox 23"/>
+          <p:cNvSpPr txBox="1"/>
+          <p:nvPr/>
+        </p:nvSpPr>
+        <p:spPr>
+          <a:xfrm>
+            <a:off x="11045952" y="2907792"/>
+            <a:ext cx="685800" cy="219456"/>
+          </a:xfrm>
+          <a:prstGeom prst="rect">
+            <a:avLst/>
+          </a:prstGeom>
+          <a:noFill/>
+        </p:spPr>
+        <p:txBody>
+          <a:bodyPr wrap="none" lIns="18288" rIns="18288" tIns="18288" bIns="18288">
+            <a:spAutoFit/>
+          </a:bodyPr>
+          <a:lstStyle/>
+          <a:p>
+            <a:r>
+              <a:rPr sz="800" b="0">
+                <a:solidFill>
+                  <a:srgbClr val="1A2026"/>
+                </a:solidFill>
+                <a:latin typeface="Microsoft YaHei"/>
+              </a:rPr>
+              <a:t>21.01%</a:t>
+            </a:r>
+          </a:p>
+        </p:txBody>
+      </p:sp>
+      <p:sp>
+        <p:nvSpPr>
+          <p:cNvPr id="25" name="TextBox 24"/>
+          <p:cNvSpPr txBox="1"/>
+          <p:nvPr/>
+        </p:nvSpPr>
+        <p:spPr>
+          <a:xfrm>
+            <a:off x="640080" y="3502152"/>
+            <a:ext cx="2057400" cy="219456"/>
+          </a:xfrm>
+          <a:prstGeom prst="rect">
+            <a:avLst/>
+          </a:prstGeom>
+          <a:noFill/>
+        </p:spPr>
+        <p:txBody>
+          <a:bodyPr wrap="none" lIns="18288" rIns="18288" tIns="18288" bIns="18288">
+            <a:spAutoFit/>
+          </a:bodyPr>
+          <a:lstStyle/>
+          <a:p>
+            <a:r>
+              <a:rPr sz="900" b="0">
+                <a:solidFill>
+                  <a:srgbClr val="1A2026"/>
+                </a:solidFill>
+                <a:latin typeface="Microsoft YaHei"/>
+              </a:rPr>
+              <a:t>兴全安泰积极养老五年</a:t>
+            </a:r>
+          </a:p>
+        </p:txBody>
+      </p:sp>
+      <p:sp>
+        <p:nvSpPr>
+          <p:cNvPr id="26" name="Rectangle 25"/>
+          <p:cNvSpPr/>
+          <p:nvPr/>
+        </p:nvSpPr>
+        <p:spPr>
+          <a:xfrm>
+            <a:off x="2788920" y="3520440"/>
+            <a:ext cx="622943" cy="201168"/>
+          </a:xfrm>
+          <a:prstGeom prst="rect">
+            <a:avLst/>
+          </a:prstGeom>
+          <a:solidFill>
+            <a:srgbClr val="BF4040"/>
+          </a:solidFill>
+          <a:ln>
+            <a:noFill/>
+          </a:ln>
+        </p:spPr>
+        <p:style>
+          <a:lnRef idx="1">
+            <a:schemeClr val="accent1"/>
+          </a:lnRef>
+          <a:fillRef idx="3">
+            <a:schemeClr val="accent1"/>
+          </a:fillRef>
+          <a:effectRef idx="2">
+            <a:schemeClr val="accent1"/>
+          </a:effectRef>
+          <a:fontRef idx="minor">
+            <a:schemeClr val="lt1"/>
+          </a:fontRef>
+        </p:style>
+        <p:txBody>
+          <a:bodyPr rtlCol="0" anchor="ctr"/>
+          <a:lstStyle/>
+          <a:p>
+            <a:pPr algn="ctr"/>
+          </a:p>
+        </p:txBody>
+      </p:sp>
+      <p:sp>
+        <p:nvSpPr>
+          <p:cNvPr id="27" name="TextBox 26"/>
+          <p:cNvSpPr txBox="1"/>
+          <p:nvPr/>
+        </p:nvSpPr>
+        <p:spPr>
+          <a:xfrm>
+            <a:off x="5285232" y="3502152"/>
+            <a:ext cx="685800" cy="219456"/>
+          </a:xfrm>
+          <a:prstGeom prst="rect">
+            <a:avLst/>
+          </a:prstGeom>
+          <a:noFill/>
+        </p:spPr>
+        <p:txBody>
+          <a:bodyPr wrap="none" lIns="18288" rIns="18288" tIns="18288" bIns="18288">
+            <a:spAutoFit/>
+          </a:bodyPr>
+          <a:lstStyle/>
+          <a:p>
+            <a:r>
+              <a:rPr sz="800" b="0">
+                <a:solidFill>
+                  <a:srgbClr val="1A2026"/>
+                </a:solidFill>
+                <a:latin typeface="Microsoft YaHei"/>
+              </a:rPr>
+              <a:t>-6.59%</a:t>
+            </a:r>
+          </a:p>
+        </p:txBody>
+      </p:sp>
+      <p:sp>
+        <p:nvSpPr>
+          <p:cNvPr id="28" name="TextBox 27"/>
+          <p:cNvSpPr txBox="1"/>
+          <p:nvPr/>
+        </p:nvSpPr>
+        <p:spPr>
+          <a:xfrm>
+            <a:off x="6400800" y="3502152"/>
+            <a:ext cx="2057400" cy="219456"/>
+          </a:xfrm>
+          <a:prstGeom prst="rect">
+            <a:avLst/>
+          </a:prstGeom>
+          <a:noFill/>
+        </p:spPr>
+        <p:txBody>
+          <a:bodyPr wrap="none" lIns="18288" rIns="18288" tIns="18288" bIns="18288">
+            <a:spAutoFit/>
+          </a:bodyPr>
+          <a:lstStyle/>
+          <a:p>
+            <a:r>
+              <a:rPr sz="900" b="0">
+                <a:solidFill>
+                  <a:srgbClr val="1A2026"/>
+                </a:solidFill>
+                <a:latin typeface="Microsoft YaHei"/>
+              </a:rPr>
+              <a:t>兴全安泰积极养老五年</a:t>
+            </a:r>
+          </a:p>
+        </p:txBody>
+      </p:sp>
+      <p:sp>
+        <p:nvSpPr>
+          <p:cNvPr id="29" name="Rectangle 28"/>
+          <p:cNvSpPr/>
+          <p:nvPr/>
+        </p:nvSpPr>
+        <p:spPr>
+          <a:xfrm>
+            <a:off x="8549640" y="3520440"/>
+            <a:ext cx="969092" cy="201168"/>
           </a:xfrm>
           <a:prstGeom prst="rect">
             <a:avLst/>
@@ -7773,13 +8439,13 @@
       </p:sp>
       <p:sp>
         <p:nvSpPr>
-          <p:cNvPr id="12" name="TextBox 11"/>
-          <p:cNvSpPr txBox="1"/>
-          <p:nvPr/>
-        </p:nvSpPr>
-        <p:spPr>
-          <a:xfrm>
-            <a:off x="11045952" y="1719072"/>
+          <p:cNvPr id="30" name="TextBox 29"/>
+          <p:cNvSpPr txBox="1"/>
+          <p:nvPr/>
+        </p:nvSpPr>
+        <p:spPr>
+          <a:xfrm>
+            <a:off x="11045952" y="3502152"/>
             <a:ext cx="685800" cy="219456"/>
           </a:xfrm>
           <a:prstGeom prst="rect">
@@ -7800,20 +8466,20 @@
                 </a:solidFill>
                 <a:latin typeface="Microsoft YaHei"/>
               </a:rPr>
-              <a:t>20.29%</a:t>
-            </a:r>
-          </a:p>
-        </p:txBody>
-      </p:sp>
-      <p:sp>
-        <p:nvSpPr>
-          <p:cNvPr id="13" name="TextBox 12"/>
-          <p:cNvSpPr txBox="1"/>
-          <p:nvPr/>
-        </p:nvSpPr>
-        <p:spPr>
-          <a:xfrm>
-            <a:off x="640080" y="2313432"/>
+              <a:t>15.57%</a:t>
+            </a:r>
+          </a:p>
+        </p:txBody>
+      </p:sp>
+      <p:sp>
+        <p:nvSpPr>
+          <p:cNvPr id="31" name="TextBox 30"/>
+          <p:cNvSpPr txBox="1"/>
+          <p:nvPr/>
+        </p:nvSpPr>
+        <p:spPr>
+          <a:xfrm>
+            <a:off x="640080" y="4096512"/>
             <a:ext cx="2057400" cy="219456"/>
           </a:xfrm>
           <a:prstGeom prst="rect">
@@ -7834,21 +8500,21 @@
                 </a:solidFill>
                 <a:latin typeface="Microsoft YaHei"/>
               </a:rPr>
-              <a:t>富国红利精选QDII</a:t>
-            </a:r>
-          </a:p>
-        </p:txBody>
-      </p:sp>
-      <p:sp>
-        <p:nvSpPr>
-          <p:cNvPr id="14" name="Rectangle 13"/>
+              <a:t>易方达全球优质企业Q</a:t>
+            </a:r>
+          </a:p>
+        </p:txBody>
+      </p:sp>
+      <p:sp>
+        <p:nvSpPr>
+          <p:cNvPr id="32" name="Rectangle 31"/>
           <p:cNvSpPr/>
           <p:nvPr/>
         </p:nvSpPr>
         <p:spPr>
           <a:xfrm>
-            <a:off x="2788920" y="2331720"/>
-            <a:ext cx="1451443" cy="201168"/>
+            <a:off x="2788920" y="4114800"/>
+            <a:ext cx="2377440" cy="201168"/>
           </a:xfrm>
           <a:prstGeom prst="rect">
             <a:avLst/>
@@ -7884,13 +8550,13 @@
       </p:sp>
       <p:sp>
         <p:nvSpPr>
-          <p:cNvPr id="15" name="TextBox 14"/>
-          <p:cNvSpPr txBox="1"/>
-          <p:nvPr/>
-        </p:nvSpPr>
-        <p:spPr>
-          <a:xfrm>
-            <a:off x="5285232" y="2313432"/>
+          <p:cNvPr id="33" name="TextBox 32"/>
+          <p:cNvSpPr txBox="1"/>
+          <p:nvPr/>
+        </p:nvSpPr>
+        <p:spPr>
+          <a:xfrm>
+            <a:off x="5285232" y="4096512"/>
             <a:ext cx="685800" cy="219456"/>
           </a:xfrm>
           <a:prstGeom prst="rect">
@@ -7911,20 +8577,20 @@
                 </a:solidFill>
                 <a:latin typeface="Microsoft YaHei"/>
               </a:rPr>
-              <a:t>-15.26%</a:t>
-            </a:r>
-          </a:p>
-        </p:txBody>
-      </p:sp>
-      <p:sp>
-        <p:nvSpPr>
-          <p:cNvPr id="16" name="TextBox 15"/>
-          <p:cNvSpPr txBox="1"/>
-          <p:nvPr/>
-        </p:nvSpPr>
-        <p:spPr>
-          <a:xfrm>
-            <a:off x="6400800" y="2313432"/>
+              <a:t>-25.16%</a:t>
+            </a:r>
+          </a:p>
+        </p:txBody>
+      </p:sp>
+      <p:sp>
+        <p:nvSpPr>
+          <p:cNvPr id="34" name="TextBox 33"/>
+          <p:cNvSpPr txBox="1"/>
+          <p:nvPr/>
+        </p:nvSpPr>
+        <p:spPr>
+          <a:xfrm>
+            <a:off x="6400800" y="4096512"/>
             <a:ext cx="2057400" cy="219456"/>
           </a:xfrm>
           <a:prstGeom prst="rect">
@@ -7945,21 +8611,21 @@
                 </a:solidFill>
                 <a:latin typeface="Microsoft YaHei"/>
               </a:rPr>
-              <a:t>富国红利精选QDII</a:t>
-            </a:r>
-          </a:p>
-        </p:txBody>
-      </p:sp>
-      <p:sp>
-        <p:nvSpPr>
-          <p:cNvPr id="17" name="Rectangle 16"/>
+              <a:t>易方达全球优质企业Q</a:t>
+            </a:r>
+          </a:p>
+        </p:txBody>
+      </p:sp>
+      <p:sp>
+        <p:nvSpPr>
+          <p:cNvPr id="35" name="Rectangle 34"/>
           <p:cNvSpPr/>
           <p:nvPr/>
         </p:nvSpPr>
         <p:spPr>
           <a:xfrm>
-            <a:off x="8549640" y="2331720"/>
-            <a:ext cx="785336" cy="201168"/>
+            <a:off x="8549640" y="4114800"/>
+            <a:ext cx="2377440" cy="201168"/>
           </a:xfrm>
           <a:prstGeom prst="rect">
             <a:avLst/>
@@ -7995,672 +8661,6 @@
       </p:sp>
       <p:sp>
         <p:nvSpPr>
-          <p:cNvPr id="18" name="TextBox 17"/>
-          <p:cNvSpPr txBox="1"/>
-          <p:nvPr/>
-        </p:nvSpPr>
-        <p:spPr>
-          <a:xfrm>
-            <a:off x="11045952" y="2313432"/>
-            <a:ext cx="685800" cy="219456"/>
-          </a:xfrm>
-          <a:prstGeom prst="rect">
-            <a:avLst/>
-          </a:prstGeom>
-          <a:noFill/>
-        </p:spPr>
-        <p:txBody>
-          <a:bodyPr wrap="none" lIns="18288" rIns="18288" tIns="18288" bIns="18288">
-            <a:spAutoFit/>
-          </a:bodyPr>
-          <a:lstStyle/>
-          <a:p>
-            <a:r>
-              <a:rPr sz="800" b="0">
-                <a:solidFill>
-                  <a:srgbClr val="1A2026"/>
-                </a:solidFill>
-                <a:latin typeface="Microsoft YaHei"/>
-              </a:rPr>
-              <a:t>12.69%</a:t>
-            </a:r>
-          </a:p>
-        </p:txBody>
-      </p:sp>
-      <p:sp>
-        <p:nvSpPr>
-          <p:cNvPr id="19" name="TextBox 18"/>
-          <p:cNvSpPr txBox="1"/>
-          <p:nvPr/>
-        </p:nvSpPr>
-        <p:spPr>
-          <a:xfrm>
-            <a:off x="640080" y="2907792"/>
-            <a:ext cx="2057400" cy="219456"/>
-          </a:xfrm>
-          <a:prstGeom prst="rect">
-            <a:avLst/>
-          </a:prstGeom>
-          <a:noFill/>
-        </p:spPr>
-        <p:txBody>
-          <a:bodyPr wrap="none" lIns="18288" rIns="18288" tIns="18288" bIns="18288">
-            <a:spAutoFit/>
-          </a:bodyPr>
-          <a:lstStyle/>
-          <a:p>
-            <a:r>
-              <a:rPr sz="900" b="0">
-                <a:solidFill>
-                  <a:srgbClr val="1A2026"/>
-                </a:solidFill>
-                <a:latin typeface="Microsoft YaHei"/>
-              </a:rPr>
-              <a:t>纳斯达克100指数Q</a:t>
-            </a:r>
-          </a:p>
-        </p:txBody>
-      </p:sp>
-      <p:sp>
-        <p:nvSpPr>
-          <p:cNvPr id="20" name="Rectangle 19"/>
-          <p:cNvSpPr/>
-          <p:nvPr/>
-        </p:nvSpPr>
-        <p:spPr>
-          <a:xfrm>
-            <a:off x="2788920" y="2926080"/>
-            <a:ext cx="996678" cy="201168"/>
-          </a:xfrm>
-          <a:prstGeom prst="rect">
-            <a:avLst/>
-          </a:prstGeom>
-          <a:solidFill>
-            <a:srgbClr val="BF4040"/>
-          </a:solidFill>
-          <a:ln>
-            <a:noFill/>
-          </a:ln>
-        </p:spPr>
-        <p:style>
-          <a:lnRef idx="1">
-            <a:schemeClr val="accent1"/>
-          </a:lnRef>
-          <a:fillRef idx="3">
-            <a:schemeClr val="accent1"/>
-          </a:fillRef>
-          <a:effectRef idx="2">
-            <a:schemeClr val="accent1"/>
-          </a:effectRef>
-          <a:fontRef idx="minor">
-            <a:schemeClr val="lt1"/>
-          </a:fontRef>
-        </p:style>
-        <p:txBody>
-          <a:bodyPr rtlCol="0" anchor="ctr"/>
-          <a:lstStyle/>
-          <a:p>
-            <a:pPr algn="ctr"/>
-          </a:p>
-        </p:txBody>
-      </p:sp>
-      <p:sp>
-        <p:nvSpPr>
-          <p:cNvPr id="21" name="TextBox 20"/>
-          <p:cNvSpPr txBox="1"/>
-          <p:nvPr/>
-        </p:nvSpPr>
-        <p:spPr>
-          <a:xfrm>
-            <a:off x="5285232" y="2907792"/>
-            <a:ext cx="685800" cy="219456"/>
-          </a:xfrm>
-          <a:prstGeom prst="rect">
-            <a:avLst/>
-          </a:prstGeom>
-          <a:noFill/>
-        </p:spPr>
-        <p:txBody>
-          <a:bodyPr wrap="none" lIns="18288" rIns="18288" tIns="18288" bIns="18288">
-            <a:spAutoFit/>
-          </a:bodyPr>
-          <a:lstStyle/>
-          <a:p>
-            <a:r>
-              <a:rPr sz="800" b="0">
-                <a:solidFill>
-                  <a:srgbClr val="1A2026"/>
-                </a:solidFill>
-                <a:latin typeface="Microsoft YaHei"/>
-              </a:rPr>
-              <a:t>-10.48%</a:t>
-            </a:r>
-          </a:p>
-        </p:txBody>
-      </p:sp>
-      <p:sp>
-        <p:nvSpPr>
-          <p:cNvPr id="22" name="TextBox 21"/>
-          <p:cNvSpPr txBox="1"/>
-          <p:nvPr/>
-        </p:nvSpPr>
-        <p:spPr>
-          <a:xfrm>
-            <a:off x="6400800" y="2907792"/>
-            <a:ext cx="2057400" cy="219456"/>
-          </a:xfrm>
-          <a:prstGeom prst="rect">
-            <a:avLst/>
-          </a:prstGeom>
-          <a:noFill/>
-        </p:spPr>
-        <p:txBody>
-          <a:bodyPr wrap="none" lIns="18288" rIns="18288" tIns="18288" bIns="18288">
-            <a:spAutoFit/>
-          </a:bodyPr>
-          <a:lstStyle/>
-          <a:p>
-            <a:r>
-              <a:rPr sz="900" b="0">
-                <a:solidFill>
-                  <a:srgbClr val="1A2026"/>
-                </a:solidFill>
-                <a:latin typeface="Microsoft YaHei"/>
-              </a:rPr>
-              <a:t>纳斯达克100指数Q</a:t>
-            </a:r>
-          </a:p>
-        </p:txBody>
-      </p:sp>
-      <p:sp>
-        <p:nvSpPr>
-          <p:cNvPr id="23" name="Rectangle 22"/>
-          <p:cNvSpPr/>
-          <p:nvPr/>
-        </p:nvSpPr>
-        <p:spPr>
-          <a:xfrm>
-            <a:off x="8549640" y="2926080"/>
-            <a:ext cx="1297774" cy="201168"/>
-          </a:xfrm>
-          <a:prstGeom prst="rect">
-            <a:avLst/>
-          </a:prstGeom>
-          <a:solidFill>
-            <a:srgbClr val="BF4040"/>
-          </a:solidFill>
-          <a:ln>
-            <a:noFill/>
-          </a:ln>
-        </p:spPr>
-        <p:style>
-          <a:lnRef idx="1">
-            <a:schemeClr val="accent1"/>
-          </a:lnRef>
-          <a:fillRef idx="3">
-            <a:schemeClr val="accent1"/>
-          </a:fillRef>
-          <a:effectRef idx="2">
-            <a:schemeClr val="accent1"/>
-          </a:effectRef>
-          <a:fontRef idx="minor">
-            <a:schemeClr val="lt1"/>
-          </a:fontRef>
-        </p:style>
-        <p:txBody>
-          <a:bodyPr rtlCol="0" anchor="ctr"/>
-          <a:lstStyle/>
-          <a:p>
-            <a:pPr algn="ctr"/>
-          </a:p>
-        </p:txBody>
-      </p:sp>
-      <p:sp>
-        <p:nvSpPr>
-          <p:cNvPr id="24" name="TextBox 23"/>
-          <p:cNvSpPr txBox="1"/>
-          <p:nvPr/>
-        </p:nvSpPr>
-        <p:spPr>
-          <a:xfrm>
-            <a:off x="11045952" y="2907792"/>
-            <a:ext cx="685800" cy="219456"/>
-          </a:xfrm>
-          <a:prstGeom prst="rect">
-            <a:avLst/>
-          </a:prstGeom>
-          <a:noFill/>
-        </p:spPr>
-        <p:txBody>
-          <a:bodyPr wrap="none" lIns="18288" rIns="18288" tIns="18288" bIns="18288">
-            <a:spAutoFit/>
-          </a:bodyPr>
-          <a:lstStyle/>
-          <a:p>
-            <a:r>
-              <a:rPr sz="800" b="0">
-                <a:solidFill>
-                  <a:srgbClr val="1A2026"/>
-                </a:solidFill>
-                <a:latin typeface="Microsoft YaHei"/>
-              </a:rPr>
-              <a:t>20.97%</a:t>
-            </a:r>
-          </a:p>
-        </p:txBody>
-      </p:sp>
-      <p:sp>
-        <p:nvSpPr>
-          <p:cNvPr id="25" name="TextBox 24"/>
-          <p:cNvSpPr txBox="1"/>
-          <p:nvPr/>
-        </p:nvSpPr>
-        <p:spPr>
-          <a:xfrm>
-            <a:off x="640080" y="3502152"/>
-            <a:ext cx="2057400" cy="219456"/>
-          </a:xfrm>
-          <a:prstGeom prst="rect">
-            <a:avLst/>
-          </a:prstGeom>
-          <a:noFill/>
-        </p:spPr>
-        <p:txBody>
-          <a:bodyPr wrap="none" lIns="18288" rIns="18288" tIns="18288" bIns="18288">
-            <a:spAutoFit/>
-          </a:bodyPr>
-          <a:lstStyle/>
-          <a:p>
-            <a:r>
-              <a:rPr sz="900" b="0">
-                <a:solidFill>
-                  <a:srgbClr val="1A2026"/>
-                </a:solidFill>
-                <a:latin typeface="Microsoft YaHei"/>
-              </a:rPr>
-              <a:t>兴全安泰积极养老五年</a:t>
-            </a:r>
-          </a:p>
-        </p:txBody>
-      </p:sp>
-      <p:sp>
-        <p:nvSpPr>
-          <p:cNvPr id="26" name="Rectangle 25"/>
-          <p:cNvSpPr/>
-          <p:nvPr/>
-        </p:nvSpPr>
-        <p:spPr>
-          <a:xfrm>
-            <a:off x="2788920" y="3520440"/>
-            <a:ext cx="627084" cy="201168"/>
-          </a:xfrm>
-          <a:prstGeom prst="rect">
-            <a:avLst/>
-          </a:prstGeom>
-          <a:solidFill>
-            <a:srgbClr val="BF4040"/>
-          </a:solidFill>
-          <a:ln>
-            <a:noFill/>
-          </a:ln>
-        </p:spPr>
-        <p:style>
-          <a:lnRef idx="1">
-            <a:schemeClr val="accent1"/>
-          </a:lnRef>
-          <a:fillRef idx="3">
-            <a:schemeClr val="accent1"/>
-          </a:fillRef>
-          <a:effectRef idx="2">
-            <a:schemeClr val="accent1"/>
-          </a:effectRef>
-          <a:fontRef idx="minor">
-            <a:schemeClr val="lt1"/>
-          </a:fontRef>
-        </p:style>
-        <p:txBody>
-          <a:bodyPr rtlCol="0" anchor="ctr"/>
-          <a:lstStyle/>
-          <a:p>
-            <a:pPr algn="ctr"/>
-          </a:p>
-        </p:txBody>
-      </p:sp>
-      <p:sp>
-        <p:nvSpPr>
-          <p:cNvPr id="27" name="TextBox 26"/>
-          <p:cNvSpPr txBox="1"/>
-          <p:nvPr/>
-        </p:nvSpPr>
-        <p:spPr>
-          <a:xfrm>
-            <a:off x="5285232" y="3502152"/>
-            <a:ext cx="685800" cy="219456"/>
-          </a:xfrm>
-          <a:prstGeom prst="rect">
-            <a:avLst/>
-          </a:prstGeom>
-          <a:noFill/>
-        </p:spPr>
-        <p:txBody>
-          <a:bodyPr wrap="none" lIns="18288" rIns="18288" tIns="18288" bIns="18288">
-            <a:spAutoFit/>
-          </a:bodyPr>
-          <a:lstStyle/>
-          <a:p>
-            <a:r>
-              <a:rPr sz="800" b="0">
-                <a:solidFill>
-                  <a:srgbClr val="1A2026"/>
-                </a:solidFill>
-                <a:latin typeface="Microsoft YaHei"/>
-              </a:rPr>
-              <a:t>-6.59%</a:t>
-            </a:r>
-          </a:p>
-        </p:txBody>
-      </p:sp>
-      <p:sp>
-        <p:nvSpPr>
-          <p:cNvPr id="28" name="TextBox 27"/>
-          <p:cNvSpPr txBox="1"/>
-          <p:nvPr/>
-        </p:nvSpPr>
-        <p:spPr>
-          <a:xfrm>
-            <a:off x="6400800" y="3502152"/>
-            <a:ext cx="2057400" cy="219456"/>
-          </a:xfrm>
-          <a:prstGeom prst="rect">
-            <a:avLst/>
-          </a:prstGeom>
-          <a:noFill/>
-        </p:spPr>
-        <p:txBody>
-          <a:bodyPr wrap="none" lIns="18288" rIns="18288" tIns="18288" bIns="18288">
-            <a:spAutoFit/>
-          </a:bodyPr>
-          <a:lstStyle/>
-          <a:p>
-            <a:r>
-              <a:rPr sz="900" b="0">
-                <a:solidFill>
-                  <a:srgbClr val="1A2026"/>
-                </a:solidFill>
-                <a:latin typeface="Microsoft YaHei"/>
-              </a:rPr>
-              <a:t>兴全安泰积极养老五年</a:t>
-            </a:r>
-          </a:p>
-        </p:txBody>
-      </p:sp>
-      <p:sp>
-        <p:nvSpPr>
-          <p:cNvPr id="29" name="Rectangle 28"/>
-          <p:cNvSpPr/>
-          <p:nvPr/>
-        </p:nvSpPr>
-        <p:spPr>
-          <a:xfrm>
-            <a:off x="8549640" y="3520440"/>
-            <a:ext cx="960353" cy="201168"/>
-          </a:xfrm>
-          <a:prstGeom prst="rect">
-            <a:avLst/>
-          </a:prstGeom>
-          <a:solidFill>
-            <a:srgbClr val="BF842D"/>
-          </a:solidFill>
-          <a:ln>
-            <a:noFill/>
-          </a:ln>
-        </p:spPr>
-        <p:style>
-          <a:lnRef idx="1">
-            <a:schemeClr val="accent1"/>
-          </a:lnRef>
-          <a:fillRef idx="3">
-            <a:schemeClr val="accent1"/>
-          </a:fillRef>
-          <a:effectRef idx="2">
-            <a:schemeClr val="accent1"/>
-          </a:effectRef>
-          <a:fontRef idx="minor">
-            <a:schemeClr val="lt1"/>
-          </a:fontRef>
-        </p:style>
-        <p:txBody>
-          <a:bodyPr rtlCol="0" anchor="ctr"/>
-          <a:lstStyle/>
-          <a:p>
-            <a:pPr algn="ctr"/>
-          </a:p>
-        </p:txBody>
-      </p:sp>
-      <p:sp>
-        <p:nvSpPr>
-          <p:cNvPr id="30" name="TextBox 29"/>
-          <p:cNvSpPr txBox="1"/>
-          <p:nvPr/>
-        </p:nvSpPr>
-        <p:spPr>
-          <a:xfrm>
-            <a:off x="11045952" y="3502152"/>
-            <a:ext cx="685800" cy="219456"/>
-          </a:xfrm>
-          <a:prstGeom prst="rect">
-            <a:avLst/>
-          </a:prstGeom>
-          <a:noFill/>
-        </p:spPr>
-        <p:txBody>
-          <a:bodyPr wrap="none" lIns="18288" rIns="18288" tIns="18288" bIns="18288">
-            <a:spAutoFit/>
-          </a:bodyPr>
-          <a:lstStyle/>
-          <a:p>
-            <a:r>
-              <a:rPr sz="800" b="0">
-                <a:solidFill>
-                  <a:srgbClr val="1A2026"/>
-                </a:solidFill>
-                <a:latin typeface="Microsoft YaHei"/>
-              </a:rPr>
-              <a:t>15.52%</a:t>
-            </a:r>
-          </a:p>
-        </p:txBody>
-      </p:sp>
-      <p:sp>
-        <p:nvSpPr>
-          <p:cNvPr id="31" name="TextBox 30"/>
-          <p:cNvSpPr txBox="1"/>
-          <p:nvPr/>
-        </p:nvSpPr>
-        <p:spPr>
-          <a:xfrm>
-            <a:off x="640080" y="4096512"/>
-            <a:ext cx="2057400" cy="219456"/>
-          </a:xfrm>
-          <a:prstGeom prst="rect">
-            <a:avLst/>
-          </a:prstGeom>
-          <a:noFill/>
-        </p:spPr>
-        <p:txBody>
-          <a:bodyPr wrap="none" lIns="18288" rIns="18288" tIns="18288" bIns="18288">
-            <a:spAutoFit/>
-          </a:bodyPr>
-          <a:lstStyle/>
-          <a:p>
-            <a:r>
-              <a:rPr sz="900" b="0">
-                <a:solidFill>
-                  <a:srgbClr val="1A2026"/>
-                </a:solidFill>
-                <a:latin typeface="Microsoft YaHei"/>
-              </a:rPr>
-              <a:t>易方达全球优质企业Q</a:t>
-            </a:r>
-          </a:p>
-        </p:txBody>
-      </p:sp>
-      <p:sp>
-        <p:nvSpPr>
-          <p:cNvPr id="32" name="Rectangle 31"/>
-          <p:cNvSpPr/>
-          <p:nvPr/>
-        </p:nvSpPr>
-        <p:spPr>
-          <a:xfrm>
-            <a:off x="2788920" y="4114800"/>
-            <a:ext cx="2377440" cy="201168"/>
-          </a:xfrm>
-          <a:prstGeom prst="rect">
-            <a:avLst/>
-          </a:prstGeom>
-          <a:solidFill>
-            <a:srgbClr val="BF4040"/>
-          </a:solidFill>
-          <a:ln>
-            <a:noFill/>
-          </a:ln>
-        </p:spPr>
-        <p:style>
-          <a:lnRef idx="1">
-            <a:schemeClr val="accent1"/>
-          </a:lnRef>
-          <a:fillRef idx="3">
-            <a:schemeClr val="accent1"/>
-          </a:fillRef>
-          <a:effectRef idx="2">
-            <a:schemeClr val="accent1"/>
-          </a:effectRef>
-          <a:fontRef idx="minor">
-            <a:schemeClr val="lt1"/>
-          </a:fontRef>
-        </p:style>
-        <p:txBody>
-          <a:bodyPr rtlCol="0" anchor="ctr"/>
-          <a:lstStyle/>
-          <a:p>
-            <a:pPr algn="ctr"/>
-          </a:p>
-        </p:txBody>
-      </p:sp>
-      <p:sp>
-        <p:nvSpPr>
-          <p:cNvPr id="33" name="TextBox 32"/>
-          <p:cNvSpPr txBox="1"/>
-          <p:nvPr/>
-        </p:nvSpPr>
-        <p:spPr>
-          <a:xfrm>
-            <a:off x="5285232" y="4096512"/>
-            <a:ext cx="685800" cy="219456"/>
-          </a:xfrm>
-          <a:prstGeom prst="rect">
-            <a:avLst/>
-          </a:prstGeom>
-          <a:noFill/>
-        </p:spPr>
-        <p:txBody>
-          <a:bodyPr wrap="none" lIns="18288" rIns="18288" tIns="18288" bIns="18288">
-            <a:spAutoFit/>
-          </a:bodyPr>
-          <a:lstStyle/>
-          <a:p>
-            <a:r>
-              <a:rPr sz="800" b="0">
-                <a:solidFill>
-                  <a:srgbClr val="1A2026"/>
-                </a:solidFill>
-                <a:latin typeface="Microsoft YaHei"/>
-              </a:rPr>
-              <a:t>-24.99%</a:t>
-            </a:r>
-          </a:p>
-        </p:txBody>
-      </p:sp>
-      <p:sp>
-        <p:nvSpPr>
-          <p:cNvPr id="34" name="TextBox 33"/>
-          <p:cNvSpPr txBox="1"/>
-          <p:nvPr/>
-        </p:nvSpPr>
-        <p:spPr>
-          <a:xfrm>
-            <a:off x="6400800" y="4096512"/>
-            <a:ext cx="2057400" cy="219456"/>
-          </a:xfrm>
-          <a:prstGeom prst="rect">
-            <a:avLst/>
-          </a:prstGeom>
-          <a:noFill/>
-        </p:spPr>
-        <p:txBody>
-          <a:bodyPr wrap="none" lIns="18288" rIns="18288" tIns="18288" bIns="18288">
-            <a:spAutoFit/>
-          </a:bodyPr>
-          <a:lstStyle/>
-          <a:p>
-            <a:r>
-              <a:rPr sz="900" b="0">
-                <a:solidFill>
-                  <a:srgbClr val="1A2026"/>
-                </a:solidFill>
-                <a:latin typeface="Microsoft YaHei"/>
-              </a:rPr>
-              <a:t>易方达全球优质企业Q</a:t>
-            </a:r>
-          </a:p>
-        </p:txBody>
-      </p:sp>
-      <p:sp>
-        <p:nvSpPr>
-          <p:cNvPr id="35" name="Rectangle 34"/>
-          <p:cNvSpPr/>
-          <p:nvPr/>
-        </p:nvSpPr>
-        <p:spPr>
-          <a:xfrm>
-            <a:off x="8549640" y="4114800"/>
-            <a:ext cx="2377440" cy="201168"/>
-          </a:xfrm>
-          <a:prstGeom prst="rect">
-            <a:avLst/>
-          </a:prstGeom>
-          <a:solidFill>
-            <a:srgbClr val="BF4040"/>
-          </a:solidFill>
-          <a:ln>
-            <a:noFill/>
-          </a:ln>
-        </p:spPr>
-        <p:style>
-          <a:lnRef idx="1">
-            <a:schemeClr val="accent1"/>
-          </a:lnRef>
-          <a:fillRef idx="3">
-            <a:schemeClr val="accent1"/>
-          </a:fillRef>
-          <a:effectRef idx="2">
-            <a:schemeClr val="accent1"/>
-          </a:effectRef>
-          <a:fontRef idx="minor">
-            <a:schemeClr val="lt1"/>
-          </a:fontRef>
-        </p:style>
-        <p:txBody>
-          <a:bodyPr rtlCol="0" anchor="ctr"/>
-          <a:lstStyle/>
-          <a:p>
-            <a:pPr algn="ctr"/>
-          </a:p>
-        </p:txBody>
-      </p:sp>
-      <p:sp>
-        <p:nvSpPr>
           <p:cNvPr id="36" name="TextBox 35"/>
           <p:cNvSpPr txBox="1"/>
           <p:nvPr/>
@@ -8688,7 +8688,7 @@
                 </a:solidFill>
                 <a:latin typeface="Microsoft YaHei"/>
               </a:rPr>
-              <a:t>38.42%</a:t>
+              <a:t>38.20%</a:t>
             </a:r>
           </a:p>
         </p:txBody>
@@ -8767,7 +8767,7 @@
                 </a:solidFill>
                 <a:latin typeface="Microsoft YaHei"/>
               </a:rPr>
-              <a:t>高风险关注：富国红利精选QDII、纳斯达克100指数QDII、易方达全球优质企业QDII</a:t>
+              <a:t>高风险关注：华夏沪深300ETF联接、富国红利精选QDII、纳斯达克100指数QDII、易方达全球优质企业QDII</a:t>
             </a:r>
           </a:p>
         </p:txBody>
@@ -9108,7 +9108,7 @@
                 </a:solidFill>
                 <a:latin typeface="Microsoft YaHei"/>
               </a:rPr>
-              <a:t>2026-09-14</a:t>
+              <a:t>2026-09-15</a:t>
             </a:r>
           </a:p>
         </p:txBody>
@@ -9172,11 +9172,11 @@
             <a:r>
               <a:rPr sz="900" b="1">
                 <a:solidFill>
-                  <a:srgbClr val="BF842D"/>
-                </a:solidFill>
-                <a:latin typeface="Microsoft YaHei"/>
-              </a:rPr>
-              <a:t>中等波动</a:t>
+                  <a:srgbClr val="BF4040"/>
+                </a:solidFill>
+                <a:latin typeface="Microsoft YaHei"/>
+              </a:rPr>
+              <a:t>高风险关注</a:t>
             </a:r>
           </a:p>
         </p:txBody>
@@ -9244,7 +9244,7 @@
                 </a:solidFill>
                 <a:latin typeface="Microsoft YaHei"/>
               </a:rPr>
-              <a:t>2026-09-11</a:t>
+              <a:t>2026-09-14</a:t>
             </a:r>
           </a:p>
         </p:txBody>
@@ -9380,7 +9380,7 @@
                 </a:solidFill>
                 <a:latin typeface="Microsoft YaHei"/>
               </a:rPr>
-              <a:t>2026-09-11</a:t>
+              <a:t>2026-09-14</a:t>
             </a:r>
           </a:p>
         </p:txBody>
@@ -9516,7 +9516,7 @@
                 </a:solidFill>
                 <a:latin typeface="Microsoft YaHei"/>
               </a:rPr>
-              <a:t>2026-09-10</a:t>
+              <a:t>2026-09-11</a:t>
             </a:r>
           </a:p>
         </p:txBody>
@@ -9652,7 +9652,7 @@
                 </a:solidFill>
                 <a:latin typeface="Microsoft YaHei"/>
               </a:rPr>
-              <a:t>2026-09-11</a:t>
+              <a:t>2026-09-14</a:t>
             </a:r>
           </a:p>
         </p:txBody>
